--- a/deliverables/信任守护师_赛题2_初赛PPT.pptx
+++ b/deliverables/信任守护师_赛题2_初赛PPT.pptx
@@ -17,6 +17,7 @@
     <p:sldId id="265" r:id="rId16"/>
     <p:sldId id="266" r:id="rId17"/>
     <p:sldId id="267" r:id="rId18"/>
+    <p:sldId id="268" r:id="rId19"/>
   </p:sldIdLst>
   <p:sldSz cx="12191695" cy="6858000" type="screen4x3"/>
   <p:notesSz cx="6858000" cy="9144000"/>
@@ -3423,7 +3424,7 @@
                 </a:solidFill>
                 <a:latin typeface="Microsoft YaHei"/>
               </a:rPr>
-              <a:t>四层</a:t>
+              <a:t>五维</a:t>
             </a:r>
           </a:p>
         </p:txBody>
@@ -3972,11 +3973,11 @@
             <a:r>
               <a:rPr sz="1200" b="1">
                 <a:solidFill>
-                  <a:srgbClr val="4DA3FF"/>
-                </a:solidFill>
-                <a:latin typeface="Microsoft YaHei"/>
-              </a:rPr>
-              <a:t>09  效果与严谨性</a:t>
+                  <a:srgbClr val="35D39A"/>
+                </a:solidFill>
+                <a:latin typeface="Microsoft YaHei"/>
+              </a:rPr>
+              <a:t>09  测试数据包</a:t>
             </a:r>
           </a:p>
         </p:txBody>
@@ -4015,7 +4016,7 @@
                 </a:solidFill>
                 <a:latin typeface="Microsoft YaHei"/>
               </a:rPr>
-              <a:t>我们交的不只是系统，还有一套可复现的评测</a:t>
+              <a:t>我们连测试数据一起交：50 条，覆盖三场景与三档难度</a:t>
             </a:r>
           </a:p>
         </p:txBody>
@@ -4054,7 +4055,7 @@
                 </a:solidFill>
                 <a:latin typeface="Microsoft YaHei"/>
               </a:rPr>
-              <a:t>50 条自建样本，真伪 28:22，带 ground-truth mask</a:t>
+              <a:t>赛题看的不只是跑分，而是这份数据本身经不经得起看</a:t>
             </a:r>
           </a:p>
         </p:txBody>
@@ -4067,8 +4068,8 @@
         </p:nvSpPr>
         <p:spPr>
           <a:xfrm>
-            <a:off x="685800" y="1938528"/>
-            <a:ext cx="2029968" cy="1051560"/>
+            <a:off x="685800" y="1993392"/>
+            <a:ext cx="5394960" cy="2880360"/>
           </a:xfrm>
           <a:prstGeom prst="roundRect">
             <a:avLst>
@@ -4114,33 +4115,33 @@
         </p:nvSpPr>
         <p:spPr>
           <a:xfrm>
-            <a:off x="685800" y="2029968"/>
-            <a:ext cx="2029968" cy="457200"/>
-          </a:xfrm>
-          <a:prstGeom prst="rect">
-            <a:avLst/>
-          </a:prstGeom>
-          <a:noFill/>
-        </p:spPr>
-        <p:txBody>
-          <a:bodyPr wrap="square" anchor="t" lIns="0" rIns="0" tIns="0" bIns="0">
-            <a:spAutoFit/>
-          </a:bodyPr>
-          <a:lstStyle/>
-          <a:p>
-            <a:pPr algn="ctr">
-              <a:lnSpc>
-                <a:spcPct val="135000"/>
-              </a:lnSpc>
-            </a:pPr>
-            <a:r>
-              <a:rPr sz="2000" b="1">
-                <a:solidFill>
-                  <a:srgbClr val="4DA3FF"/>
-                </a:solidFill>
-                <a:latin typeface="Microsoft YaHei"/>
-              </a:rPr>
-              <a:t>50</a:t>
+            <a:off x="914400" y="2103120"/>
+            <a:ext cx="4937760" cy="320040"/>
+          </a:xfrm>
+          <a:prstGeom prst="rect">
+            <a:avLst/>
+          </a:prstGeom>
+          <a:noFill/>
+        </p:spPr>
+        <p:txBody>
+          <a:bodyPr wrap="square" anchor="t" lIns="0" rIns="0" tIns="0" bIns="0">
+            <a:spAutoFit/>
+          </a:bodyPr>
+          <a:lstStyle/>
+          <a:p>
+            <a:pPr algn="l">
+              <a:lnSpc>
+                <a:spcPct val="135000"/>
+              </a:lnSpc>
+            </a:pPr>
+            <a:r>
+              <a:rPr sz="1150" b="1">
+                <a:solidFill>
+                  <a:srgbClr val="5F7395"/>
+                </a:solidFill>
+                <a:latin typeface="Microsoft YaHei"/>
+              </a:rPr>
+              <a:t>样本构成</a:t>
             </a:r>
           </a:p>
         </p:txBody>
@@ -4153,47 +4154,320 @@
         </p:nvSpPr>
         <p:spPr>
           <a:xfrm>
-            <a:off x="685800" y="2542032"/>
-            <a:ext cx="2029968" cy="274320"/>
-          </a:xfrm>
-          <a:prstGeom prst="rect">
-            <a:avLst/>
-          </a:prstGeom>
-          <a:noFill/>
-        </p:spPr>
-        <p:txBody>
-          <a:bodyPr wrap="square" anchor="t" lIns="0" rIns="0" tIns="0" bIns="0">
-            <a:spAutoFit/>
-          </a:bodyPr>
-          <a:lstStyle/>
-          <a:p>
-            <a:pPr algn="ctr">
-              <a:lnSpc>
-                <a:spcPct val="135000"/>
-              </a:lnSpc>
-            </a:pPr>
-            <a:r>
-              <a:rPr sz="950" b="0">
-                <a:solidFill>
-                  <a:srgbClr val="5F7395"/>
-                </a:solidFill>
-                <a:latin typeface="Microsoft YaHei"/>
-              </a:rPr>
-              <a:t>测试样本</a:t>
-            </a:r>
-          </a:p>
-        </p:txBody>
-      </p:sp>
-      <p:sp>
-        <p:nvSpPr>
-          <p:cNvPr id="9" name="Rounded Rectangle 8"/>
+            <a:off x="914400" y="2514600"/>
+            <a:ext cx="914400" cy="274320"/>
+          </a:xfrm>
+          <a:prstGeom prst="rect">
+            <a:avLst/>
+          </a:prstGeom>
+          <a:noFill/>
+        </p:spPr>
+        <p:txBody>
+          <a:bodyPr wrap="square" anchor="t" lIns="0" rIns="0" tIns="0" bIns="0">
+            <a:spAutoFit/>
+          </a:bodyPr>
+          <a:lstStyle/>
+          <a:p>
+            <a:pPr algn="l">
+              <a:lnSpc>
+                <a:spcPct val="135000"/>
+              </a:lnSpc>
+            </a:pPr>
+            <a:r>
+              <a:rPr sz="1000" b="0">
+                <a:solidFill>
+                  <a:srgbClr val="8EA3C4"/>
+                </a:solidFill>
+                <a:latin typeface="Microsoft YaHei"/>
+              </a:rPr>
+              <a:t>场景</a:t>
+            </a:r>
+          </a:p>
+        </p:txBody>
+      </p:sp>
+      <p:sp>
+        <p:nvSpPr>
+          <p:cNvPr id="9" name="TextBox 8"/>
+          <p:cNvSpPr txBox="1"/>
+          <p:nvPr/>
+        </p:nvSpPr>
+        <p:spPr>
+          <a:xfrm>
+            <a:off x="1600200" y="2514600"/>
+            <a:ext cx="4297680" cy="274320"/>
+          </a:xfrm>
+          <a:prstGeom prst="rect">
+            <a:avLst/>
+          </a:prstGeom>
+          <a:noFill/>
+        </p:spPr>
+        <p:txBody>
+          <a:bodyPr wrap="square" anchor="t" lIns="0" rIns="0" tIns="0" bIns="0">
+            <a:spAutoFit/>
+          </a:bodyPr>
+          <a:lstStyle/>
+          <a:p>
+            <a:pPr algn="l">
+              <a:lnSpc>
+                <a:spcPct val="135000"/>
+              </a:lnSpc>
+            </a:pPr>
+            <a:r>
+              <a:rPr sz="1050" b="1">
+                <a:solidFill>
+                  <a:srgbClr val="E8EEFB"/>
+                </a:solidFill>
+                <a:latin typeface="Microsoft YaHei"/>
+              </a:rPr>
+              <a:t>种草 20　·　评论 15　·　素材 15</a:t>
+            </a:r>
+          </a:p>
+        </p:txBody>
+      </p:sp>
+      <p:sp>
+        <p:nvSpPr>
+          <p:cNvPr id="10" name="TextBox 9"/>
+          <p:cNvSpPr txBox="1"/>
+          <p:nvPr/>
+        </p:nvSpPr>
+        <p:spPr>
+          <a:xfrm>
+            <a:off x="914400" y="3081528"/>
+            <a:ext cx="914400" cy="274320"/>
+          </a:xfrm>
+          <a:prstGeom prst="rect">
+            <a:avLst/>
+          </a:prstGeom>
+          <a:noFill/>
+        </p:spPr>
+        <p:txBody>
+          <a:bodyPr wrap="square" anchor="t" lIns="0" rIns="0" tIns="0" bIns="0">
+            <a:spAutoFit/>
+          </a:bodyPr>
+          <a:lstStyle/>
+          <a:p>
+            <a:pPr algn="l">
+              <a:lnSpc>
+                <a:spcPct val="135000"/>
+              </a:lnSpc>
+            </a:pPr>
+            <a:r>
+              <a:rPr sz="1000" b="0">
+                <a:solidFill>
+                  <a:srgbClr val="8EA3C4"/>
+                </a:solidFill>
+                <a:latin typeface="Microsoft YaHei"/>
+              </a:rPr>
+              <a:t>真伪</a:t>
+            </a:r>
+          </a:p>
+        </p:txBody>
+      </p:sp>
+      <p:sp>
+        <p:nvSpPr>
+          <p:cNvPr id="11" name="TextBox 10"/>
+          <p:cNvSpPr txBox="1"/>
+          <p:nvPr/>
+        </p:nvSpPr>
+        <p:spPr>
+          <a:xfrm>
+            <a:off x="1600200" y="3081528"/>
+            <a:ext cx="4297680" cy="274320"/>
+          </a:xfrm>
+          <a:prstGeom prst="rect">
+            <a:avLst/>
+          </a:prstGeom>
+          <a:noFill/>
+        </p:spPr>
+        <p:txBody>
+          <a:bodyPr wrap="square" anchor="t" lIns="0" rIns="0" tIns="0" bIns="0">
+            <a:spAutoFit/>
+          </a:bodyPr>
+          <a:lstStyle/>
+          <a:p>
+            <a:pPr algn="l">
+              <a:lnSpc>
+                <a:spcPct val="135000"/>
+              </a:lnSpc>
+            </a:pPr>
+            <a:r>
+              <a:rPr sz="1050" b="1">
+                <a:solidFill>
+                  <a:srgbClr val="E8EEFB"/>
+                </a:solidFill>
+                <a:latin typeface="Microsoft YaHei"/>
+              </a:rPr>
+              <a:t>伪造 28　·　真实 22</a:t>
+            </a:r>
+          </a:p>
+        </p:txBody>
+      </p:sp>
+      <p:sp>
+        <p:nvSpPr>
+          <p:cNvPr id="12" name="TextBox 11"/>
+          <p:cNvSpPr txBox="1"/>
+          <p:nvPr/>
+        </p:nvSpPr>
+        <p:spPr>
+          <a:xfrm>
+            <a:off x="914400" y="3648456"/>
+            <a:ext cx="914400" cy="274320"/>
+          </a:xfrm>
+          <a:prstGeom prst="rect">
+            <a:avLst/>
+          </a:prstGeom>
+          <a:noFill/>
+        </p:spPr>
+        <p:txBody>
+          <a:bodyPr wrap="square" anchor="t" lIns="0" rIns="0" tIns="0" bIns="0">
+            <a:spAutoFit/>
+          </a:bodyPr>
+          <a:lstStyle/>
+          <a:p>
+            <a:pPr algn="l">
+              <a:lnSpc>
+                <a:spcPct val="135000"/>
+              </a:lnSpc>
+            </a:pPr>
+            <a:r>
+              <a:rPr sz="1000" b="0">
+                <a:solidFill>
+                  <a:srgbClr val="8EA3C4"/>
+                </a:solidFill>
+                <a:latin typeface="Microsoft YaHei"/>
+              </a:rPr>
+              <a:t>难度</a:t>
+            </a:r>
+          </a:p>
+        </p:txBody>
+      </p:sp>
+      <p:sp>
+        <p:nvSpPr>
+          <p:cNvPr id="13" name="TextBox 12"/>
+          <p:cNvSpPr txBox="1"/>
+          <p:nvPr/>
+        </p:nvSpPr>
+        <p:spPr>
+          <a:xfrm>
+            <a:off x="1600200" y="3648456"/>
+            <a:ext cx="4297680" cy="274320"/>
+          </a:xfrm>
+          <a:prstGeom prst="rect">
+            <a:avLst/>
+          </a:prstGeom>
+          <a:noFill/>
+        </p:spPr>
+        <p:txBody>
+          <a:bodyPr wrap="square" anchor="t" lIns="0" rIns="0" tIns="0" bIns="0">
+            <a:spAutoFit/>
+          </a:bodyPr>
+          <a:lstStyle/>
+          <a:p>
+            <a:pPr algn="l">
+              <a:lnSpc>
+                <a:spcPct val="135000"/>
+              </a:lnSpc>
+            </a:pPr>
+            <a:r>
+              <a:rPr sz="1050" b="1">
+                <a:solidFill>
+                  <a:srgbClr val="E8EEFB"/>
+                </a:solidFill>
+                <a:latin typeface="Microsoft YaHei"/>
+              </a:rPr>
+              <a:t>easy 7　·　medium 17　·　hard 4　·　real 22</a:t>
+            </a:r>
+          </a:p>
+        </p:txBody>
+      </p:sp>
+      <p:sp>
+        <p:nvSpPr>
+          <p:cNvPr id="14" name="TextBox 13"/>
+          <p:cNvSpPr txBox="1"/>
+          <p:nvPr/>
+        </p:nvSpPr>
+        <p:spPr>
+          <a:xfrm>
+            <a:off x="914400" y="4215384"/>
+            <a:ext cx="914400" cy="274320"/>
+          </a:xfrm>
+          <a:prstGeom prst="rect">
+            <a:avLst/>
+          </a:prstGeom>
+          <a:noFill/>
+        </p:spPr>
+        <p:txBody>
+          <a:bodyPr wrap="square" anchor="t" lIns="0" rIns="0" tIns="0" bIns="0">
+            <a:spAutoFit/>
+          </a:bodyPr>
+          <a:lstStyle/>
+          <a:p>
+            <a:pPr algn="l">
+              <a:lnSpc>
+                <a:spcPct val="135000"/>
+              </a:lnSpc>
+            </a:pPr>
+            <a:r>
+              <a:rPr sz="1000" b="0">
+                <a:solidFill>
+                  <a:srgbClr val="8EA3C4"/>
+                </a:solidFill>
+                <a:latin typeface="Microsoft YaHei"/>
+              </a:rPr>
+              <a:t>标注</a:t>
+            </a:r>
+          </a:p>
+        </p:txBody>
+      </p:sp>
+      <p:sp>
+        <p:nvSpPr>
+          <p:cNvPr id="15" name="TextBox 14"/>
+          <p:cNvSpPr txBox="1"/>
+          <p:nvPr/>
+        </p:nvSpPr>
+        <p:spPr>
+          <a:xfrm>
+            <a:off x="1600200" y="4215384"/>
+            <a:ext cx="4297680" cy="274320"/>
+          </a:xfrm>
+          <a:prstGeom prst="rect">
+            <a:avLst/>
+          </a:prstGeom>
+          <a:noFill/>
+        </p:spPr>
+        <p:txBody>
+          <a:bodyPr wrap="square" anchor="t" lIns="0" rIns="0" tIns="0" bIns="0">
+            <a:spAutoFit/>
+          </a:bodyPr>
+          <a:lstStyle/>
+          <a:p>
+            <a:pPr algn="l">
+              <a:lnSpc>
+                <a:spcPct val="135000"/>
+              </a:lnSpc>
+            </a:pPr>
+            <a:r>
+              <a:rPr sz="1050" b="1">
+                <a:solidFill>
+                  <a:srgbClr val="E8EEFB"/>
+                </a:solidFill>
+                <a:latin typeface="Microsoft YaHei"/>
+              </a:rPr>
+              <a:t>12 张 mask.png（逐像素篡改区域）</a:t>
+            </a:r>
+          </a:p>
+        </p:txBody>
+      </p:sp>
+      <p:sp>
+        <p:nvSpPr>
+          <p:cNvPr id="16" name="Rounded Rectangle 15"/>
           <p:cNvSpPr/>
           <p:nvPr/>
         </p:nvSpPr>
         <p:spPr>
           <a:xfrm>
-            <a:off x="2880360" y="1938528"/>
-            <a:ext cx="2029968" cy="1051560"/>
+            <a:off x="6263640" y="1993392"/>
+            <a:ext cx="5212080" cy="2880360"/>
           </a:xfrm>
           <a:prstGeom prst="roundRect">
             <a:avLst>
@@ -4201,7 +4475,7 @@
             </a:avLst>
           </a:prstGeom>
           <a:solidFill>
-            <a:srgbClr val="131C30"/>
+            <a:srgbClr val="0F1A2B"/>
           </a:solidFill>
           <a:ln w="9525">
             <a:solidFill>
@@ -4233,92 +4507,443 @@
       </p:sp>
       <p:sp>
         <p:nvSpPr>
-          <p:cNvPr id="10" name="TextBox 9"/>
-          <p:cNvSpPr txBox="1"/>
-          <p:nvPr/>
-        </p:nvSpPr>
-        <p:spPr>
-          <a:xfrm>
-            <a:off x="2880360" y="2029968"/>
-            <a:ext cx="2029968" cy="457200"/>
-          </a:xfrm>
-          <a:prstGeom prst="rect">
-            <a:avLst/>
-          </a:prstGeom>
-          <a:noFill/>
-        </p:spPr>
-        <p:txBody>
-          <a:bodyPr wrap="square" anchor="t" lIns="0" rIns="0" tIns="0" bIns="0">
-            <a:spAutoFit/>
-          </a:bodyPr>
-          <a:lstStyle/>
-          <a:p>
-            <a:pPr algn="ctr">
-              <a:lnSpc>
-                <a:spcPct val="135000"/>
-              </a:lnSpc>
-            </a:pPr>
-            <a:r>
-              <a:rPr sz="2000" b="1">
+          <p:cNvPr id="17" name="TextBox 16"/>
+          <p:cNvSpPr txBox="1"/>
+          <p:nvPr/>
+        </p:nvSpPr>
+        <p:spPr>
+          <a:xfrm>
+            <a:off x="6492240" y="2103120"/>
+            <a:ext cx="4754880" cy="320040"/>
+          </a:xfrm>
+          <a:prstGeom prst="rect">
+            <a:avLst/>
+          </a:prstGeom>
+          <a:noFill/>
+        </p:spPr>
+        <p:txBody>
+          <a:bodyPr wrap="square" anchor="t" lIns="0" rIns="0" tIns="0" bIns="0">
+            <a:spAutoFit/>
+          </a:bodyPr>
+          <a:lstStyle/>
+          <a:p>
+            <a:pPr algn="l">
+              <a:lnSpc>
+                <a:spcPct val="135000"/>
+              </a:lnSpc>
+            </a:pPr>
+            <a:r>
+              <a:rPr sz="1150" b="1">
+                <a:solidFill>
+                  <a:srgbClr val="5F7395"/>
+                </a:solidFill>
+                <a:latin typeface="Microsoft YaHei"/>
+              </a:rPr>
+              <a:t>五类伪造手法（不是同一种东西做五遍）</a:t>
+            </a:r>
+          </a:p>
+        </p:txBody>
+      </p:sp>
+      <p:sp>
+        <p:nvSpPr>
+          <p:cNvPr id="18" name="TextBox 17"/>
+          <p:cNvSpPr txBox="1"/>
+          <p:nvPr/>
+        </p:nvSpPr>
+        <p:spPr>
+          <a:xfrm>
+            <a:off x="6492240" y="2514600"/>
+            <a:ext cx="3931920" cy="274320"/>
+          </a:xfrm>
+          <a:prstGeom prst="rect">
+            <a:avLst/>
+          </a:prstGeom>
+          <a:noFill/>
+        </p:spPr>
+        <p:txBody>
+          <a:bodyPr wrap="square" anchor="t" lIns="0" rIns="0" tIns="0" bIns="0">
+            <a:spAutoFit/>
+          </a:bodyPr>
+          <a:lstStyle/>
+          <a:p>
+            <a:pPr algn="l">
+              <a:lnSpc>
+                <a:spcPct val="135000"/>
+              </a:lnSpc>
+            </a:pPr>
+            <a:r>
+              <a:rPr sz="1000" b="0">
+                <a:solidFill>
+                  <a:srgbClr val="C9D8EF"/>
+                </a:solidFill>
+                <a:latin typeface="Microsoft YaHei"/>
+              </a:rPr>
+              <a:t>· 大面积磨皮 + 提亮</a:t>
+            </a:r>
+          </a:p>
+        </p:txBody>
+      </p:sp>
+      <p:sp>
+        <p:nvSpPr>
+          <p:cNvPr id="19" name="TextBox 18"/>
+          <p:cNvSpPr txBox="1"/>
+          <p:nvPr/>
+        </p:nvSpPr>
+        <p:spPr>
+          <a:xfrm>
+            <a:off x="10378440" y="2514600"/>
+            <a:ext cx="822960" cy="274320"/>
+          </a:xfrm>
+          <a:prstGeom prst="rect">
+            <a:avLst/>
+          </a:prstGeom>
+          <a:noFill/>
+        </p:spPr>
+        <p:txBody>
+          <a:bodyPr wrap="square" anchor="t" lIns="0" rIns="0" tIns="0" bIns="0">
+            <a:spAutoFit/>
+          </a:bodyPr>
+          <a:lstStyle/>
+          <a:p>
+            <a:pPr algn="r">
+              <a:lnSpc>
+                <a:spcPct val="135000"/>
+              </a:lnSpc>
+            </a:pPr>
+            <a:r>
+              <a:rPr sz="1000" b="1">
                 <a:solidFill>
                   <a:srgbClr val="FFB020"/>
                 </a:solidFill>
                 <a:latin typeface="Microsoft YaHei"/>
               </a:rPr>
-              <a:t>28 / 22</a:t>
-            </a:r>
-          </a:p>
-        </p:txBody>
-      </p:sp>
-      <p:sp>
-        <p:nvSpPr>
-          <p:cNvPr id="11" name="TextBox 10"/>
-          <p:cNvSpPr txBox="1"/>
-          <p:nvPr/>
-        </p:nvSpPr>
-        <p:spPr>
-          <a:xfrm>
-            <a:off x="2880360" y="2542032"/>
-            <a:ext cx="2029968" cy="274320"/>
-          </a:xfrm>
-          <a:prstGeom prst="rect">
-            <a:avLst/>
-          </a:prstGeom>
-          <a:noFill/>
-        </p:spPr>
-        <p:txBody>
-          <a:bodyPr wrap="square" anchor="t" lIns="0" rIns="0" tIns="0" bIns="0">
-            <a:spAutoFit/>
-          </a:bodyPr>
-          <a:lstStyle/>
-          <a:p>
-            <a:pPr algn="ctr">
-              <a:lnSpc>
-                <a:spcPct val="135000"/>
-              </a:lnSpc>
-            </a:pPr>
-            <a:r>
-              <a:rPr sz="950" b="0">
-                <a:solidFill>
-                  <a:srgbClr val="5F7395"/>
-                </a:solidFill>
-                <a:latin typeface="Microsoft YaHei"/>
-              </a:rPr>
-              <a:t>伪造 / 真实</a:t>
-            </a:r>
-          </a:p>
-        </p:txBody>
-      </p:sp>
-      <p:sp>
-        <p:nvSpPr>
-          <p:cNvPr id="12" name="Rounded Rectangle 11"/>
+              <a:t>4 条</a:t>
+            </a:r>
+          </a:p>
+        </p:txBody>
+      </p:sp>
+      <p:sp>
+        <p:nvSpPr>
+          <p:cNvPr id="20" name="TextBox 19"/>
+          <p:cNvSpPr txBox="1"/>
+          <p:nvPr/>
+        </p:nvSpPr>
+        <p:spPr>
+          <a:xfrm>
+            <a:off x="6492240" y="2953512"/>
+            <a:ext cx="3931920" cy="274320"/>
+          </a:xfrm>
+          <a:prstGeom prst="rect">
+            <a:avLst/>
+          </a:prstGeom>
+          <a:noFill/>
+        </p:spPr>
+        <p:txBody>
+          <a:bodyPr wrap="square" anchor="t" lIns="0" rIns="0" tIns="0" bIns="0">
+            <a:spAutoFit/>
+          </a:bodyPr>
+          <a:lstStyle/>
+          <a:p>
+            <a:pPr algn="l">
+              <a:lnSpc>
+                <a:spcPct val="135000"/>
+              </a:lnSpc>
+            </a:pPr>
+            <a:r>
+              <a:rPr sz="1000" b="0">
+                <a:solidFill>
+                  <a:srgbClr val="C9D8EF"/>
+                </a:solidFill>
+                <a:latin typeface="Microsoft YaHei"/>
+              </a:rPr>
+              <a:t>· 局部磨皮 + 拼接</a:t>
+            </a:r>
+          </a:p>
+        </p:txBody>
+      </p:sp>
+      <p:sp>
+        <p:nvSpPr>
+          <p:cNvPr id="21" name="TextBox 20"/>
+          <p:cNvSpPr txBox="1"/>
+          <p:nvPr/>
+        </p:nvSpPr>
+        <p:spPr>
+          <a:xfrm>
+            <a:off x="10378440" y="2953512"/>
+            <a:ext cx="822960" cy="274320"/>
+          </a:xfrm>
+          <a:prstGeom prst="rect">
+            <a:avLst/>
+          </a:prstGeom>
+          <a:noFill/>
+        </p:spPr>
+        <p:txBody>
+          <a:bodyPr wrap="square" anchor="t" lIns="0" rIns="0" tIns="0" bIns="0">
+            <a:spAutoFit/>
+          </a:bodyPr>
+          <a:lstStyle/>
+          <a:p>
+            <a:pPr algn="r">
+              <a:lnSpc>
+                <a:spcPct val="135000"/>
+              </a:lnSpc>
+            </a:pPr>
+            <a:r>
+              <a:rPr sz="1000" b="1">
+                <a:solidFill>
+                  <a:srgbClr val="FFB020"/>
+                </a:solidFill>
+                <a:latin typeface="Microsoft YaHei"/>
+              </a:rPr>
+              <a:t>4 条</a:t>
+            </a:r>
+          </a:p>
+        </p:txBody>
+      </p:sp>
+      <p:sp>
+        <p:nvSpPr>
+          <p:cNvPr id="22" name="TextBox 21"/>
+          <p:cNvSpPr txBox="1"/>
+          <p:nvPr/>
+        </p:nvSpPr>
+        <p:spPr>
+          <a:xfrm>
+            <a:off x="6492240" y="3392424"/>
+            <a:ext cx="3931920" cy="274320"/>
+          </a:xfrm>
+          <a:prstGeom prst="rect">
+            <a:avLst/>
+          </a:prstGeom>
+          <a:noFill/>
+        </p:spPr>
+        <p:txBody>
+          <a:bodyPr wrap="square" anchor="t" lIns="0" rIns="0" tIns="0" bIns="0">
+            <a:spAutoFit/>
+          </a:bodyPr>
+          <a:lstStyle/>
+          <a:p>
+            <a:pPr algn="l">
+              <a:lnSpc>
+                <a:spcPct val="135000"/>
+              </a:lnSpc>
+            </a:pPr>
+            <a:r>
+              <a:rPr sz="1000" b="0">
+                <a:solidFill>
+                  <a:srgbClr val="C9D8EF"/>
+                </a:solidFill>
+                <a:latin typeface="Microsoft YaHei"/>
+              </a:rPr>
+              <a:t>· 轻度磨皮 + 拼接 + 重压缩</a:t>
+            </a:r>
+          </a:p>
+        </p:txBody>
+      </p:sp>
+      <p:sp>
+        <p:nvSpPr>
+          <p:cNvPr id="23" name="TextBox 22"/>
+          <p:cNvSpPr txBox="1"/>
+          <p:nvPr/>
+        </p:nvSpPr>
+        <p:spPr>
+          <a:xfrm>
+            <a:off x="10378440" y="3392424"/>
+            <a:ext cx="822960" cy="274320"/>
+          </a:xfrm>
+          <a:prstGeom prst="rect">
+            <a:avLst/>
+          </a:prstGeom>
+          <a:noFill/>
+        </p:spPr>
+        <p:txBody>
+          <a:bodyPr wrap="square" anchor="t" lIns="0" rIns="0" tIns="0" bIns="0">
+            <a:spAutoFit/>
+          </a:bodyPr>
+          <a:lstStyle/>
+          <a:p>
+            <a:pPr algn="r">
+              <a:lnSpc>
+                <a:spcPct val="135000"/>
+              </a:lnSpc>
+            </a:pPr>
+            <a:r>
+              <a:rPr sz="1000" b="1">
+                <a:solidFill>
+                  <a:srgbClr val="FFB020"/>
+                </a:solidFill>
+                <a:latin typeface="Microsoft YaHei"/>
+              </a:rPr>
+              <a:t>4 条</a:t>
+            </a:r>
+          </a:p>
+        </p:txBody>
+      </p:sp>
+      <p:sp>
+        <p:nvSpPr>
+          <p:cNvPr id="24" name="TextBox 23"/>
+          <p:cNvSpPr txBox="1"/>
+          <p:nvPr/>
+        </p:nvSpPr>
+        <p:spPr>
+          <a:xfrm>
+            <a:off x="6492240" y="3831335"/>
+            <a:ext cx="3931920" cy="274320"/>
+          </a:xfrm>
+          <a:prstGeom prst="rect">
+            <a:avLst/>
+          </a:prstGeom>
+          <a:noFill/>
+        </p:spPr>
+        <p:txBody>
+          <a:bodyPr wrap="square" anchor="t" lIns="0" rIns="0" tIns="0" bIns="0">
+            <a:spAutoFit/>
+          </a:bodyPr>
+          <a:lstStyle/>
+          <a:p>
+            <a:pPr algn="l">
+              <a:lnSpc>
+                <a:spcPct val="135000"/>
+              </a:lnSpc>
+            </a:pPr>
+            <a:r>
+              <a:rPr sz="1000" b="0">
+                <a:solidFill>
+                  <a:srgbClr val="C9D8EF"/>
+                </a:solidFill>
+                <a:latin typeface="Microsoft YaHei"/>
+              </a:rPr>
+              <a:t>· 重度平滑 + 色彩拉伸（模拟 AIGC 重绘）</a:t>
+            </a:r>
+          </a:p>
+        </p:txBody>
+      </p:sp>
+      <p:sp>
+        <p:nvSpPr>
+          <p:cNvPr id="25" name="TextBox 24"/>
+          <p:cNvSpPr txBox="1"/>
+          <p:nvPr/>
+        </p:nvSpPr>
+        <p:spPr>
+          <a:xfrm>
+            <a:off x="10378440" y="3831335"/>
+            <a:ext cx="822960" cy="274320"/>
+          </a:xfrm>
+          <a:prstGeom prst="rect">
+            <a:avLst/>
+          </a:prstGeom>
+          <a:noFill/>
+        </p:spPr>
+        <p:txBody>
+          <a:bodyPr wrap="square" anchor="t" lIns="0" rIns="0" tIns="0" bIns="0">
+            <a:spAutoFit/>
+          </a:bodyPr>
+          <a:lstStyle/>
+          <a:p>
+            <a:pPr algn="r">
+              <a:lnSpc>
+                <a:spcPct val="135000"/>
+              </a:lnSpc>
+            </a:pPr>
+            <a:r>
+              <a:rPr sz="1000" b="1">
+                <a:solidFill>
+                  <a:srgbClr val="FFB020"/>
+                </a:solidFill>
+                <a:latin typeface="Microsoft YaHei"/>
+              </a:rPr>
+              <a:t>8 条</a:t>
+            </a:r>
+          </a:p>
+        </p:txBody>
+      </p:sp>
+      <p:sp>
+        <p:nvSpPr>
+          <p:cNvPr id="26" name="TextBox 25"/>
+          <p:cNvSpPr txBox="1"/>
+          <p:nvPr/>
+        </p:nvSpPr>
+        <p:spPr>
+          <a:xfrm>
+            <a:off x="6492240" y="4270248"/>
+            <a:ext cx="3931920" cy="274320"/>
+          </a:xfrm>
+          <a:prstGeom prst="rect">
+            <a:avLst/>
+          </a:prstGeom>
+          <a:noFill/>
+        </p:spPr>
+        <p:txBody>
+          <a:bodyPr wrap="square" anchor="t" lIns="0" rIns="0" tIns="0" bIns="0">
+            <a:spAutoFit/>
+          </a:bodyPr>
+          <a:lstStyle/>
+          <a:p>
+            <a:pPr algn="l">
+              <a:lnSpc>
+                <a:spcPct val="135000"/>
+              </a:lnSpc>
+            </a:pPr>
+            <a:r>
+              <a:rPr sz="1000" b="0">
+                <a:solidFill>
+                  <a:srgbClr val="C9D8EF"/>
+                </a:solidFill>
+                <a:latin typeface="Microsoft YaHei"/>
+              </a:rPr>
+              <a:t>· 模板化评论 + 短时间集中投放</a:t>
+            </a:r>
+          </a:p>
+        </p:txBody>
+      </p:sp>
+      <p:sp>
+        <p:nvSpPr>
+          <p:cNvPr id="27" name="TextBox 26"/>
+          <p:cNvSpPr txBox="1"/>
+          <p:nvPr/>
+        </p:nvSpPr>
+        <p:spPr>
+          <a:xfrm>
+            <a:off x="10378440" y="4270248"/>
+            <a:ext cx="822960" cy="274320"/>
+          </a:xfrm>
+          <a:prstGeom prst="rect">
+            <a:avLst/>
+          </a:prstGeom>
+          <a:noFill/>
+        </p:spPr>
+        <p:txBody>
+          <a:bodyPr wrap="square" anchor="t" lIns="0" rIns="0" tIns="0" bIns="0">
+            <a:spAutoFit/>
+          </a:bodyPr>
+          <a:lstStyle/>
+          <a:p>
+            <a:pPr algn="r">
+              <a:lnSpc>
+                <a:spcPct val="135000"/>
+              </a:lnSpc>
+            </a:pPr>
+            <a:r>
+              <a:rPr sz="1000" b="1">
+                <a:solidFill>
+                  <a:srgbClr val="FFB020"/>
+                </a:solidFill>
+                <a:latin typeface="Microsoft YaHei"/>
+              </a:rPr>
+              <a:t>8 条</a:t>
+            </a:r>
+          </a:p>
+        </p:txBody>
+      </p:sp>
+      <p:sp>
+        <p:nvSpPr>
+          <p:cNvPr id="28" name="Rounded Rectangle 27"/>
           <p:cNvSpPr/>
           <p:nvPr/>
         </p:nvSpPr>
         <p:spPr>
           <a:xfrm>
-            <a:off x="5074920" y="1938528"/>
-            <a:ext cx="2029968" cy="1051560"/>
+            <a:off x="685800" y="5029200"/>
+            <a:ext cx="6766560" cy="1051560"/>
           </a:xfrm>
           <a:prstGeom prst="roundRect">
             <a:avLst>
@@ -4326,7 +4951,7 @@
             </a:avLst>
           </a:prstGeom>
           <a:solidFill>
-            <a:srgbClr val="131C30"/>
+            <a:srgbClr val="0B1422"/>
           </a:solidFill>
           <a:ln w="9525">
             <a:solidFill>
@@ -4358,666 +4983,90 @@
       </p:sp>
       <p:sp>
         <p:nvSpPr>
-          <p:cNvPr id="13" name="TextBox 12"/>
-          <p:cNvSpPr txBox="1"/>
-          <p:nvPr/>
-        </p:nvSpPr>
-        <p:spPr>
-          <a:xfrm>
-            <a:off x="5074920" y="2029968"/>
-            <a:ext cx="2029968" cy="457200"/>
-          </a:xfrm>
-          <a:prstGeom prst="rect">
-            <a:avLst/>
-          </a:prstGeom>
-          <a:noFill/>
-        </p:spPr>
-        <p:txBody>
-          <a:bodyPr wrap="square" anchor="t" lIns="0" rIns="0" tIns="0" bIns="0">
-            <a:spAutoFit/>
-          </a:bodyPr>
-          <a:lstStyle/>
-          <a:p>
-            <a:pPr algn="ctr">
-              <a:lnSpc>
-                <a:spcPct val="135000"/>
-              </a:lnSpc>
-            </a:pPr>
-            <a:r>
-              <a:rPr sz="2000" b="1">
-                <a:solidFill>
-                  <a:srgbClr val="35D39A"/>
-                </a:solidFill>
-                <a:latin typeface="Microsoft YaHei"/>
-              </a:rPr>
-              <a:t>0.77</a:t>
-            </a:r>
-          </a:p>
-        </p:txBody>
-      </p:sp>
-      <p:sp>
-        <p:nvSpPr>
-          <p:cNvPr id="14" name="TextBox 13"/>
-          <p:cNvSpPr txBox="1"/>
-          <p:nvPr/>
-        </p:nvSpPr>
-        <p:spPr>
-          <a:xfrm>
-            <a:off x="5074920" y="2542032"/>
-            <a:ext cx="2029968" cy="274320"/>
-          </a:xfrm>
-          <a:prstGeom prst="rect">
-            <a:avLst/>
-          </a:prstGeom>
-          <a:noFill/>
-        </p:spPr>
-        <p:txBody>
-          <a:bodyPr wrap="square" anchor="t" lIns="0" rIns="0" tIns="0" bIns="0">
-            <a:spAutoFit/>
-          </a:bodyPr>
-          <a:lstStyle/>
-          <a:p>
-            <a:pPr algn="ctr">
-              <a:lnSpc>
-                <a:spcPct val="135000"/>
+          <p:cNvPr id="29" name="TextBox 28"/>
+          <p:cNvSpPr txBox="1"/>
+          <p:nvPr/>
+        </p:nvSpPr>
+        <p:spPr>
+          <a:xfrm>
+            <a:off x="868680" y="5120640"/>
+            <a:ext cx="6400800" cy="868680"/>
+          </a:xfrm>
+          <a:prstGeom prst="rect">
+            <a:avLst/>
+          </a:prstGeom>
+          <a:noFill/>
+        </p:spPr>
+        <p:txBody>
+          <a:bodyPr wrap="square" anchor="t" lIns="0" rIns="0" tIns="0" bIns="0">
+            <a:spAutoFit/>
+          </a:bodyPr>
+          <a:lstStyle/>
+          <a:p>
+            <a:pPr algn="l">
+              <a:lnSpc>
+                <a:spcPct val="150000"/>
+              </a:lnSpc>
+            </a:pPr>
+            <a:r>
+              <a:rPr sz="850" b="0">
+                <a:solidFill>
+                  <a:srgbClr val="8EA3C4"/>
+                </a:solidFill>
+                <a:latin typeface="Microsoft YaHei"/>
+              </a:rPr>
+              <a:t>sample_001/
+  ├ meta.txt     场景 / 真伪 / 难度 / 伪造方式
+  ├ mask.png     篡改区域（仅图片类样本）
+  └ post/        content.txt + image_1.jpg + image_2.jpg</a:t>
+            </a:r>
+          </a:p>
+        </p:txBody>
+      </p:sp>
+      <p:sp>
+        <p:nvSpPr>
+          <p:cNvPr id="30" name="TextBox 29"/>
+          <p:cNvSpPr txBox="1"/>
+          <p:nvPr/>
+        </p:nvSpPr>
+        <p:spPr>
+          <a:xfrm>
+            <a:off x="7635240" y="5138928"/>
+            <a:ext cx="3840480" cy="914400"/>
+          </a:xfrm>
+          <a:prstGeom prst="rect">
+            <a:avLst/>
+          </a:prstGeom>
+          <a:noFill/>
+        </p:spPr>
+        <p:txBody>
+          <a:bodyPr wrap="square" anchor="t" lIns="0" rIns="0" tIns="0" bIns="0">
+            <a:spAutoFit/>
+          </a:bodyPr>
+          <a:lstStyle/>
+          <a:p>
+            <a:pPr algn="l">
+              <a:lnSpc>
+                <a:spcPct val="160000"/>
               </a:lnSpc>
             </a:pPr>
             <a:r>
               <a:rPr sz="950" b="0">
                 <a:solidFill>
-                  <a:srgbClr val="5F7395"/>
-                </a:solidFill>
-                <a:latin typeface="Microsoft YaHei"/>
-              </a:rPr>
-              <a:t>Precision</a:t>
-            </a:r>
-          </a:p>
-        </p:txBody>
-      </p:sp>
-      <p:sp>
-        <p:nvSpPr>
-          <p:cNvPr id="15" name="Rounded Rectangle 14"/>
-          <p:cNvSpPr/>
-          <p:nvPr/>
-        </p:nvSpPr>
-        <p:spPr>
-          <a:xfrm>
-            <a:off x="7269479" y="1938528"/>
-            <a:ext cx="2029968" cy="1051560"/>
-          </a:xfrm>
-          <a:prstGeom prst="roundRect">
-            <a:avLst>
-              <a:gd name="adj" fmla="val 6000"/>
-            </a:avLst>
-          </a:prstGeom>
-          <a:solidFill>
-            <a:srgbClr val="131C30"/>
-          </a:solidFill>
-          <a:ln w="9525">
-            <a:solidFill>
-              <a:srgbClr val="243656"/>
-            </a:solidFill>
-          </a:ln>
-        </p:spPr>
-        <p:style>
-          <a:lnRef idx="1">
-            <a:schemeClr val="accent1"/>
-          </a:lnRef>
-          <a:fillRef idx="3">
-            <a:schemeClr val="accent1"/>
-          </a:fillRef>
-          <a:effectRef idx="2">
-            <a:schemeClr val="accent1"/>
-          </a:effectRef>
-          <a:fontRef idx="minor">
-            <a:schemeClr val="lt1"/>
-          </a:fontRef>
-        </p:style>
-        <p:txBody>
-          <a:bodyPr rtlCol="0" anchor="ctr"/>
-          <a:lstStyle/>
-          <a:p>
-            <a:pPr algn="ctr"/>
-          </a:p>
-        </p:txBody>
-      </p:sp>
-      <p:sp>
-        <p:nvSpPr>
-          <p:cNvPr id="16" name="TextBox 15"/>
-          <p:cNvSpPr txBox="1"/>
-          <p:nvPr/>
-        </p:nvSpPr>
-        <p:spPr>
-          <a:xfrm>
-            <a:off x="7269479" y="2029968"/>
-            <a:ext cx="2029968" cy="457200"/>
-          </a:xfrm>
-          <a:prstGeom prst="rect">
-            <a:avLst/>
-          </a:prstGeom>
-          <a:noFill/>
-        </p:spPr>
-        <p:txBody>
-          <a:bodyPr wrap="square" anchor="t" lIns="0" rIns="0" tIns="0" bIns="0">
-            <a:spAutoFit/>
-          </a:bodyPr>
-          <a:lstStyle/>
-          <a:p>
-            <a:pPr algn="ctr">
-              <a:lnSpc>
-                <a:spcPct val="135000"/>
-              </a:lnSpc>
-            </a:pPr>
-            <a:r>
-              <a:rPr sz="2000" b="1">
-                <a:solidFill>
-                  <a:srgbClr val="FF4D6D"/>
-                </a:solidFill>
-                <a:latin typeface="Microsoft YaHei"/>
-              </a:rPr>
-              <a:t>0.46</a:t>
-            </a:r>
-          </a:p>
-        </p:txBody>
-      </p:sp>
-      <p:sp>
-        <p:nvSpPr>
-          <p:cNvPr id="17" name="TextBox 16"/>
-          <p:cNvSpPr txBox="1"/>
-          <p:nvPr/>
-        </p:nvSpPr>
-        <p:spPr>
-          <a:xfrm>
-            <a:off x="7269479" y="2542032"/>
-            <a:ext cx="2029968" cy="274320"/>
-          </a:xfrm>
-          <a:prstGeom prst="rect">
-            <a:avLst/>
-          </a:prstGeom>
-          <a:noFill/>
-        </p:spPr>
-        <p:txBody>
-          <a:bodyPr wrap="square" anchor="t" lIns="0" rIns="0" tIns="0" bIns="0">
-            <a:spAutoFit/>
-          </a:bodyPr>
-          <a:lstStyle/>
-          <a:p>
-            <a:pPr algn="ctr">
-              <a:lnSpc>
-                <a:spcPct val="135000"/>
-              </a:lnSpc>
-            </a:pPr>
-            <a:r>
-              <a:rPr sz="950" b="0">
-                <a:solidFill>
-                  <a:srgbClr val="5F7395"/>
-                </a:solidFill>
-                <a:latin typeface="Microsoft YaHei"/>
-              </a:rPr>
-              <a:t>Recall</a:t>
-            </a:r>
-          </a:p>
-        </p:txBody>
-      </p:sp>
-      <p:sp>
-        <p:nvSpPr>
-          <p:cNvPr id="18" name="Rounded Rectangle 17"/>
-          <p:cNvSpPr/>
-          <p:nvPr/>
-        </p:nvSpPr>
-        <p:spPr>
-          <a:xfrm>
-            <a:off x="9464040" y="1938528"/>
-            <a:ext cx="2029968" cy="1051560"/>
-          </a:xfrm>
-          <a:prstGeom prst="roundRect">
-            <a:avLst>
-              <a:gd name="adj" fmla="val 6000"/>
-            </a:avLst>
-          </a:prstGeom>
-          <a:solidFill>
-            <a:srgbClr val="131C30"/>
-          </a:solidFill>
-          <a:ln w="9525">
-            <a:solidFill>
-              <a:srgbClr val="243656"/>
-            </a:solidFill>
-          </a:ln>
-        </p:spPr>
-        <p:style>
-          <a:lnRef idx="1">
-            <a:schemeClr val="accent1"/>
-          </a:lnRef>
-          <a:fillRef idx="3">
-            <a:schemeClr val="accent1"/>
-          </a:fillRef>
-          <a:effectRef idx="2">
-            <a:schemeClr val="accent1"/>
-          </a:effectRef>
-          <a:fontRef idx="minor">
-            <a:schemeClr val="lt1"/>
-          </a:fontRef>
-        </p:style>
-        <p:txBody>
-          <a:bodyPr rtlCol="0" anchor="ctr"/>
-          <a:lstStyle/>
-          <a:p>
-            <a:pPr algn="ctr"/>
-          </a:p>
-        </p:txBody>
-      </p:sp>
-      <p:sp>
-        <p:nvSpPr>
-          <p:cNvPr id="19" name="TextBox 18"/>
-          <p:cNvSpPr txBox="1"/>
-          <p:nvPr/>
-        </p:nvSpPr>
-        <p:spPr>
-          <a:xfrm>
-            <a:off x="9464040" y="2029968"/>
-            <a:ext cx="2029968" cy="457200"/>
-          </a:xfrm>
-          <a:prstGeom prst="rect">
-            <a:avLst/>
-          </a:prstGeom>
-          <a:noFill/>
-        </p:spPr>
-        <p:txBody>
-          <a:bodyPr wrap="square" anchor="t" lIns="0" rIns="0" tIns="0" bIns="0">
-            <a:spAutoFit/>
-          </a:bodyPr>
-          <a:lstStyle/>
-          <a:p>
-            <a:pPr algn="ctr">
-              <a:lnSpc>
-                <a:spcPct val="135000"/>
-              </a:lnSpc>
-            </a:pPr>
-            <a:r>
-              <a:rPr sz="2000" b="1">
-                <a:solidFill>
-                  <a:srgbClr val="7C6BF0"/>
-                </a:solidFill>
-                <a:latin typeface="Microsoft YaHei"/>
-              </a:rPr>
-              <a:t>0.23</a:t>
-            </a:r>
-          </a:p>
-        </p:txBody>
-      </p:sp>
-      <p:sp>
-        <p:nvSpPr>
-          <p:cNvPr id="20" name="TextBox 19"/>
-          <p:cNvSpPr txBox="1"/>
-          <p:nvPr/>
-        </p:nvSpPr>
-        <p:spPr>
-          <a:xfrm>
-            <a:off x="9464040" y="2542032"/>
-            <a:ext cx="2029968" cy="274320"/>
-          </a:xfrm>
-          <a:prstGeom prst="rect">
-            <a:avLst/>
-          </a:prstGeom>
-          <a:noFill/>
-        </p:spPr>
-        <p:txBody>
-          <a:bodyPr wrap="square" anchor="t" lIns="0" rIns="0" tIns="0" bIns="0">
-            <a:spAutoFit/>
-          </a:bodyPr>
-          <a:lstStyle/>
-          <a:p>
-            <a:pPr algn="ctr">
-              <a:lnSpc>
-                <a:spcPct val="135000"/>
-              </a:lnSpc>
-            </a:pPr>
-            <a:r>
-              <a:rPr sz="950" b="0">
-                <a:solidFill>
-                  <a:srgbClr val="5F7395"/>
-                </a:solidFill>
-                <a:latin typeface="Microsoft YaHei"/>
-              </a:rPr>
-              <a:t>定位 IoU</a:t>
-            </a:r>
-          </a:p>
-        </p:txBody>
-      </p:sp>
-      <p:sp>
-        <p:nvSpPr>
-          <p:cNvPr id="21" name="Rounded Rectangle 20"/>
-          <p:cNvSpPr/>
-          <p:nvPr/>
-        </p:nvSpPr>
-        <p:spPr>
-          <a:xfrm>
-            <a:off x="685800" y="3218688"/>
-            <a:ext cx="5394960" cy="1463040"/>
-          </a:xfrm>
-          <a:prstGeom prst="roundRect">
-            <a:avLst>
-              <a:gd name="adj" fmla="val 6000"/>
-            </a:avLst>
-          </a:prstGeom>
-          <a:solidFill>
-            <a:srgbClr val="131C30"/>
-          </a:solidFill>
-          <a:ln w="9525">
-            <a:solidFill>
-              <a:srgbClr val="243656"/>
-            </a:solidFill>
-          </a:ln>
-        </p:spPr>
-        <p:style>
-          <a:lnRef idx="1">
-            <a:schemeClr val="accent1"/>
-          </a:lnRef>
-          <a:fillRef idx="3">
-            <a:schemeClr val="accent1"/>
-          </a:fillRef>
-          <a:effectRef idx="2">
-            <a:schemeClr val="accent1"/>
-          </a:effectRef>
-          <a:fontRef idx="minor">
-            <a:schemeClr val="lt1"/>
-          </a:fontRef>
-        </p:style>
-        <p:txBody>
-          <a:bodyPr rtlCol="0" anchor="ctr"/>
-          <a:lstStyle/>
-          <a:p>
-            <a:pPr algn="ctr"/>
-          </a:p>
-        </p:txBody>
-      </p:sp>
-      <p:sp>
-        <p:nvSpPr>
-          <p:cNvPr id="22" name="TextBox 21"/>
-          <p:cNvSpPr txBox="1"/>
-          <p:nvPr/>
-        </p:nvSpPr>
-        <p:spPr>
-          <a:xfrm>
-            <a:off x="914400" y="3291840"/>
-            <a:ext cx="4937760" cy="320040"/>
-          </a:xfrm>
-          <a:prstGeom prst="rect">
-            <a:avLst/>
-          </a:prstGeom>
-          <a:noFill/>
-        </p:spPr>
-        <p:txBody>
-          <a:bodyPr wrap="square" anchor="t" lIns="0" rIns="0" tIns="0" bIns="0">
-            <a:spAutoFit/>
-          </a:bodyPr>
-          <a:lstStyle/>
-          <a:p>
-            <a:pPr algn="l">
-              <a:lnSpc>
-                <a:spcPct val="135000"/>
-              </a:lnSpc>
-            </a:pPr>
-            <a:r>
-              <a:rPr sz="1100" b="1">
-                <a:solidFill>
-                  <a:srgbClr val="5F7395"/>
-                </a:solidFill>
-                <a:latin typeface="Microsoft YaHei"/>
-              </a:rPr>
-              <a:t>分场景 F1</a:t>
-            </a:r>
-          </a:p>
-        </p:txBody>
-      </p:sp>
-      <p:sp>
-        <p:nvSpPr>
-          <p:cNvPr id="23" name="TextBox 22"/>
-          <p:cNvSpPr txBox="1"/>
-          <p:nvPr/>
-        </p:nvSpPr>
-        <p:spPr>
-          <a:xfrm>
-            <a:off x="914400" y="3657600"/>
-            <a:ext cx="4937760" cy="914400"/>
-          </a:xfrm>
-          <a:prstGeom prst="rect">
-            <a:avLst/>
-          </a:prstGeom>
-          <a:noFill/>
-        </p:spPr>
-        <p:txBody>
-          <a:bodyPr wrap="square" anchor="t" lIns="0" rIns="0" tIns="0" bIns="0">
-            <a:spAutoFit/>
-          </a:bodyPr>
-          <a:lstStyle/>
-          <a:p>
-            <a:pPr algn="l">
-              <a:lnSpc>
-                <a:spcPct val="135000"/>
-              </a:lnSpc>
-            </a:pPr>
-            <a:r>
-              <a:rPr sz="1500" b="1">
-                <a:solidFill>
-                  <a:srgbClr val="E8EEFB"/>
-                </a:solidFill>
-                <a:latin typeface="Microsoft YaHei"/>
-              </a:rPr>
-              <a:t>种草图文 0.63　·　评论区 0.93　·　AI 素材 0.00</a:t>
-            </a:r>
-          </a:p>
-        </p:txBody>
-      </p:sp>
-      <p:sp>
-        <p:nvSpPr>
-          <p:cNvPr id="24" name="TextBox 23"/>
-          <p:cNvSpPr txBox="1"/>
-          <p:nvPr/>
-        </p:nvSpPr>
-        <p:spPr>
-          <a:xfrm>
-            <a:off x="914400" y="4224528"/>
-            <a:ext cx="4937760" cy="365760"/>
-          </a:xfrm>
-          <a:prstGeom prst="rect">
-            <a:avLst/>
-          </a:prstGeom>
-          <a:noFill/>
-        </p:spPr>
-        <p:txBody>
-          <a:bodyPr wrap="square" anchor="t" lIns="0" rIns="0" tIns="0" bIns="0">
-            <a:spAutoFit/>
-          </a:bodyPr>
-          <a:lstStyle/>
-          <a:p>
-            <a:pPr algn="l">
-              <a:lnSpc>
-                <a:spcPct val="135000"/>
-              </a:lnSpc>
-            </a:pPr>
-            <a:r>
-              <a:rPr sz="950" b="0">
-                <a:solidFill>
-                  <a:srgbClr val="8A9BB8"/>
-                </a:solidFill>
-                <a:latin typeface="Microsoft YaHei"/>
-              </a:rPr>
-              <a:t>素材场景在自建集上没有区分度，只作辅助筛查，见下一页</a:t>
-            </a:r>
-          </a:p>
-        </p:txBody>
-      </p:sp>
-      <p:sp>
-        <p:nvSpPr>
-          <p:cNvPr id="25" name="Rounded Rectangle 24"/>
-          <p:cNvSpPr/>
-          <p:nvPr/>
-        </p:nvSpPr>
-        <p:spPr>
-          <a:xfrm>
-            <a:off x="6263640" y="3218688"/>
-            <a:ext cx="5212080" cy="1463040"/>
-          </a:xfrm>
-          <a:prstGeom prst="roundRect">
-            <a:avLst>
-              <a:gd name="adj" fmla="val 6000"/>
-            </a:avLst>
-          </a:prstGeom>
-          <a:solidFill>
-            <a:srgbClr val="2A1218"/>
-          </a:solidFill>
-          <a:ln w="9525">
-            <a:solidFill>
-              <a:srgbClr val="6B2233"/>
-            </a:solidFill>
-          </a:ln>
-        </p:spPr>
-        <p:style>
-          <a:lnRef idx="1">
-            <a:schemeClr val="accent1"/>
-          </a:lnRef>
-          <a:fillRef idx="3">
-            <a:schemeClr val="accent1"/>
-          </a:fillRef>
-          <a:effectRef idx="2">
-            <a:schemeClr val="accent1"/>
-          </a:effectRef>
-          <a:fontRef idx="minor">
-            <a:schemeClr val="lt1"/>
-          </a:fontRef>
-        </p:style>
-        <p:txBody>
-          <a:bodyPr rtlCol="0" anchor="ctr"/>
-          <a:lstStyle/>
-          <a:p>
-            <a:pPr algn="ctr"/>
-          </a:p>
-        </p:txBody>
-      </p:sp>
-      <p:sp>
-        <p:nvSpPr>
-          <p:cNvPr id="26" name="TextBox 25"/>
-          <p:cNvSpPr txBox="1"/>
-          <p:nvPr/>
-        </p:nvSpPr>
-        <p:spPr>
-          <a:xfrm>
-            <a:off x="6492240" y="3291840"/>
-            <a:ext cx="4754880" cy="320040"/>
-          </a:xfrm>
-          <a:prstGeom prst="rect">
-            <a:avLst/>
-          </a:prstGeom>
-          <a:noFill/>
-        </p:spPr>
-        <p:txBody>
-          <a:bodyPr wrap="square" anchor="t" lIns="0" rIns="0" tIns="0" bIns="0">
-            <a:spAutoFit/>
-          </a:bodyPr>
-          <a:lstStyle/>
-          <a:p>
-            <a:pPr algn="l">
-              <a:lnSpc>
-                <a:spcPct val="135000"/>
-              </a:lnSpc>
-            </a:pPr>
-            <a:r>
-              <a:rPr sz="1100" b="1">
-                <a:solidFill>
-                  <a:srgbClr val="FF4D6D"/>
-                </a:solidFill>
-                <a:latin typeface="Microsoft YaHei"/>
-              </a:rPr>
-              <a:t>已知短板（不掩饰）</a:t>
-            </a:r>
-          </a:p>
-        </p:txBody>
-      </p:sp>
-      <p:sp>
-        <p:nvSpPr>
-          <p:cNvPr id="27" name="TextBox 26"/>
-          <p:cNvSpPr txBox="1"/>
-          <p:nvPr/>
-        </p:nvSpPr>
-        <p:spPr>
-          <a:xfrm>
-            <a:off x="6492240" y="3657600"/>
-            <a:ext cx="4754880" cy="914400"/>
-          </a:xfrm>
-          <a:prstGeom prst="rect">
-            <a:avLst/>
-          </a:prstGeom>
-          <a:noFill/>
-        </p:spPr>
-        <p:txBody>
-          <a:bodyPr wrap="square" anchor="t" lIns="0" rIns="0" tIns="0" bIns="0">
-            <a:spAutoFit/>
-          </a:bodyPr>
-          <a:lstStyle/>
-          <a:p>
-            <a:pPr algn="l">
-              <a:lnSpc>
-                <a:spcPct val="150000"/>
-              </a:lnSpc>
-            </a:pPr>
-            <a:r>
-              <a:rPr sz="1000" b="0">
-                <a:solidFill>
-                  <a:srgbClr val="E0B8C0"/>
-                </a:solidFill>
-                <a:latin typeface="Microsoft YaHei"/>
-              </a:rPr>
-              <a:t>早期 F1 是 0.69，其中素材场景的检出
-来自 ELA 的 z 分数退化（z=876445）；
-修正后如实回落到 0.58。</a:t>
-            </a:r>
-          </a:p>
-        </p:txBody>
-      </p:sp>
-      <p:sp>
-        <p:nvSpPr>
-          <p:cNvPr id="28" name="TextBox 27"/>
-          <p:cNvSpPr txBox="1"/>
-          <p:nvPr/>
-        </p:nvSpPr>
-        <p:spPr>
-          <a:xfrm>
-            <a:off x="685800" y="4892040"/>
-            <a:ext cx="10789920" cy="1234440"/>
-          </a:xfrm>
-          <a:prstGeom prst="rect">
-            <a:avLst/>
-          </a:prstGeom>
-          <a:noFill/>
-        </p:spPr>
-        <p:txBody>
-          <a:bodyPr wrap="square" anchor="t" lIns="0" rIns="0" tIns="0" bIns="0">
-            <a:spAutoFit/>
-          </a:bodyPr>
-          <a:lstStyle/>
-          <a:p>
-            <a:pPr algn="l">
-              <a:lnSpc>
-                <a:spcPct val="175000"/>
-              </a:lnSpc>
-            </a:pPr>
-            <a:r>
-              <a:rPr sz="1100" b="0">
-                <a:solidFill>
-                  <a:srgbClr val="8EA3C4"/>
-                </a:solidFill>
-                <a:latin typeface="Microsoft YaHei"/>
-              </a:rPr>
-              <a:t>评测方法：样本级 Precision / Recall 以 0.5 分为阈值；定位 IoU 用系统输出的可疑区域二值化后与 mask.png 对比。
-数据包里同时包含真实样本，就是为了检验系统会不会「见谁都像假的」——正是这一步暴露了上面的误报。</a:t>
-            </a:r>
-          </a:p>
-        </p:txBody>
-      </p:sp>
-      <p:sp>
-        <p:nvSpPr>
-          <p:cNvPr id="29" name="TextBox 28"/>
+                  <a:srgbClr val="9FC8FF"/>
+                </a:solidFill>
+                <a:latin typeface="Microsoft YaHei"/>
+              </a:rPr>
+              <a:t>每条样本都能复现：
+把 meta.txt 的字段喂给 eval/run_eval.py，
+就能重算出 PPT 里的所有指标。</a:t>
+            </a:r>
+          </a:p>
+        </p:txBody>
+      </p:sp>
+      <p:sp>
+        <p:nvSpPr>
+          <p:cNvPr id="31" name="TextBox 30"/>
           <p:cNvSpPr txBox="1"/>
           <p:nvPr/>
         </p:nvSpPr>
@@ -5056,7 +5105,7 @@
       </p:sp>
       <p:sp>
         <p:nvSpPr>
-          <p:cNvPr id="30" name="TextBox 29"/>
+          <p:cNvPr id="32" name="TextBox 31"/>
           <p:cNvSpPr txBox="1"/>
           <p:nvPr/>
         </p:nvSpPr>
@@ -5188,7 +5237,7 @@
                 </a:solidFill>
                 <a:latin typeface="Microsoft YaHei"/>
               </a:rPr>
-              <a:t>10  落地价值</a:t>
+              <a:t>10  效果与严谨性</a:t>
             </a:r>
           </a:p>
         </p:txBody>
@@ -5227,21 +5276,60 @@
                 </a:solidFill>
                 <a:latin typeface="Microsoft YaHei"/>
               </a:rPr>
-              <a:t>从「事后举报」变成「事前拦截」</a:t>
-            </a:r>
-          </a:p>
-        </p:txBody>
-      </p:sp>
-      <p:sp>
-        <p:nvSpPr>
-          <p:cNvPr id="5" name="Rounded Rectangle 4"/>
+              <a:t>我们交的不只是系统，还有一套可复现的评测</a:t>
+            </a:r>
+          </a:p>
+        </p:txBody>
+      </p:sp>
+      <p:sp>
+        <p:nvSpPr>
+          <p:cNvPr id="5" name="TextBox 4"/>
+          <p:cNvSpPr txBox="1"/>
+          <p:nvPr/>
+        </p:nvSpPr>
+        <p:spPr>
+          <a:xfrm>
+            <a:off x="685800" y="1481328"/>
+            <a:ext cx="10515600" cy="347472"/>
+          </a:xfrm>
+          <a:prstGeom prst="rect">
+            <a:avLst/>
+          </a:prstGeom>
+          <a:noFill/>
+        </p:spPr>
+        <p:txBody>
+          <a:bodyPr wrap="square" anchor="t" lIns="0" rIns="0" tIns="0" bIns="0">
+            <a:spAutoFit/>
+          </a:bodyPr>
+          <a:lstStyle/>
+          <a:p>
+            <a:pPr algn="l">
+              <a:lnSpc>
+                <a:spcPct val="135000"/>
+              </a:lnSpc>
+            </a:pPr>
+            <a:r>
+              <a:rPr sz="1350" b="0">
+                <a:solidFill>
+                  <a:srgbClr val="8EA3C4"/>
+                </a:solidFill>
+                <a:latin typeface="Microsoft YaHei"/>
+              </a:rPr>
+              <a:t>50 条自建样本，真伪 28:22，带 ground-truth mask</a:t>
+            </a:r>
+          </a:p>
+        </p:txBody>
+      </p:sp>
+      <p:sp>
+        <p:nvSpPr>
+          <p:cNvPr id="6" name="Rounded Rectangle 5"/>
           <p:cNvSpPr/>
           <p:nvPr/>
         </p:nvSpPr>
         <p:spPr>
           <a:xfrm>
             <a:off x="685800" y="1938528"/>
-            <a:ext cx="2331720" cy="1417320"/>
+            <a:ext cx="2029968" cy="1051560"/>
           </a:xfrm>
           <a:prstGeom prst="roundRect">
             <a:avLst>
@@ -5281,78 +5369,39 @@
       </p:sp>
       <p:sp>
         <p:nvSpPr>
-          <p:cNvPr id="6" name="TextBox 5"/>
-          <p:cNvSpPr txBox="1"/>
-          <p:nvPr/>
-        </p:nvSpPr>
-        <p:spPr>
-          <a:xfrm>
-            <a:off x="868680" y="2066543"/>
-            <a:ext cx="2011680" cy="274320"/>
-          </a:xfrm>
-          <a:prstGeom prst="rect">
-            <a:avLst/>
-          </a:prstGeom>
-          <a:noFill/>
-        </p:spPr>
-        <p:txBody>
-          <a:bodyPr wrap="square" anchor="t" lIns="0" rIns="0" tIns="0" bIns="0">
-            <a:spAutoFit/>
-          </a:bodyPr>
-          <a:lstStyle/>
-          <a:p>
-            <a:pPr algn="l">
-              <a:lnSpc>
-                <a:spcPct val="135000"/>
-              </a:lnSpc>
-            </a:pPr>
-            <a:r>
-              <a:rPr sz="1100" b="1">
-                <a:solidFill>
-                  <a:srgbClr val="35D39A"/>
-                </a:solidFill>
-                <a:latin typeface="Microsoft YaHei"/>
-              </a:rPr>
-              <a:t>01</a:t>
-            </a:r>
-          </a:p>
-        </p:txBody>
-      </p:sp>
-      <p:sp>
-        <p:nvSpPr>
           <p:cNvPr id="7" name="TextBox 6"/>
           <p:cNvSpPr txBox="1"/>
           <p:nvPr/>
         </p:nvSpPr>
         <p:spPr>
           <a:xfrm>
-            <a:off x="868680" y="2340864"/>
-            <a:ext cx="2011680" cy="320040"/>
-          </a:xfrm>
-          <a:prstGeom prst="rect">
-            <a:avLst/>
-          </a:prstGeom>
-          <a:noFill/>
-        </p:spPr>
-        <p:txBody>
-          <a:bodyPr wrap="square" anchor="t" lIns="0" rIns="0" tIns="0" bIns="0">
-            <a:spAutoFit/>
-          </a:bodyPr>
-          <a:lstStyle/>
-          <a:p>
-            <a:pPr algn="l">
-              <a:lnSpc>
-                <a:spcPct val="135000"/>
-              </a:lnSpc>
-            </a:pPr>
-            <a:r>
-              <a:rPr sz="1700" b="1">
-                <a:solidFill>
-                  <a:srgbClr val="E8EEFB"/>
-                </a:solidFill>
-                <a:latin typeface="Microsoft YaHei"/>
-              </a:rPr>
-              <a:t>抽检</a:t>
+            <a:off x="685800" y="2029968"/>
+            <a:ext cx="2029968" cy="457200"/>
+          </a:xfrm>
+          <a:prstGeom prst="rect">
+            <a:avLst/>
+          </a:prstGeom>
+          <a:noFill/>
+        </p:spPr>
+        <p:txBody>
+          <a:bodyPr wrap="square" anchor="t" lIns="0" rIns="0" tIns="0" bIns="0">
+            <a:spAutoFit/>
+          </a:bodyPr>
+          <a:lstStyle/>
+          <a:p>
+            <a:pPr algn="ctr">
+              <a:lnSpc>
+                <a:spcPct val="135000"/>
+              </a:lnSpc>
+            </a:pPr>
+            <a:r>
+              <a:rPr sz="2000" b="1">
+                <a:solidFill>
+                  <a:srgbClr val="4DA3FF"/>
+                </a:solidFill>
+                <a:latin typeface="Microsoft YaHei"/>
+              </a:rPr>
+              <a:t>50</a:t>
             </a:r>
           </a:p>
         </p:txBody>
@@ -5365,34 +5414,33 @@
         </p:nvSpPr>
         <p:spPr>
           <a:xfrm>
-            <a:off x="868680" y="2743200"/>
-            <a:ext cx="2011680" cy="548640"/>
-          </a:xfrm>
-          <a:prstGeom prst="rect">
-            <a:avLst/>
-          </a:prstGeom>
-          <a:noFill/>
-        </p:spPr>
-        <p:txBody>
-          <a:bodyPr wrap="square" anchor="t" lIns="0" rIns="0" tIns="0" bIns="0">
-            <a:spAutoFit/>
-          </a:bodyPr>
-          <a:lstStyle/>
-          <a:p>
-            <a:pPr algn="l">
-              <a:lnSpc>
-                <a:spcPct val="145000"/>
-              </a:lnSpc>
-            </a:pPr>
-            <a:r>
-              <a:rPr sz="1000" b="0">
-                <a:solidFill>
-                  <a:srgbClr val="8EA3C4"/>
-                </a:solidFill>
-                <a:latin typeface="Microsoft YaHei"/>
-              </a:rPr>
-              <a:t>每天 5% 内容
-自动过一遍</a:t>
+            <a:off x="685800" y="2542032"/>
+            <a:ext cx="2029968" cy="274320"/>
+          </a:xfrm>
+          <a:prstGeom prst="rect">
+            <a:avLst/>
+          </a:prstGeom>
+          <a:noFill/>
+        </p:spPr>
+        <p:txBody>
+          <a:bodyPr wrap="square" anchor="t" lIns="0" rIns="0" tIns="0" bIns="0">
+            <a:spAutoFit/>
+          </a:bodyPr>
+          <a:lstStyle/>
+          <a:p>
+            <a:pPr algn="ctr">
+              <a:lnSpc>
+                <a:spcPct val="135000"/>
+              </a:lnSpc>
+            </a:pPr>
+            <a:r>
+              <a:rPr sz="950" b="0">
+                <a:solidFill>
+                  <a:srgbClr val="5F7395"/>
+                </a:solidFill>
+                <a:latin typeface="Microsoft YaHei"/>
+              </a:rPr>
+              <a:t>测试样本</a:t>
             </a:r>
           </a:p>
         </p:txBody>
@@ -5405,8 +5453,8 @@
         </p:nvSpPr>
         <p:spPr>
           <a:xfrm>
-            <a:off x="3227832" y="1938528"/>
-            <a:ext cx="2331720" cy="1417320"/>
+            <a:off x="2880360" y="1938528"/>
+            <a:ext cx="2029968" cy="1051560"/>
           </a:xfrm>
           <a:prstGeom prst="roundRect">
             <a:avLst>
@@ -5452,33 +5500,33 @@
         </p:nvSpPr>
         <p:spPr>
           <a:xfrm>
-            <a:off x="3410712" y="2066543"/>
-            <a:ext cx="2011680" cy="274320"/>
-          </a:xfrm>
-          <a:prstGeom prst="rect">
-            <a:avLst/>
-          </a:prstGeom>
-          <a:noFill/>
-        </p:spPr>
-        <p:txBody>
-          <a:bodyPr wrap="square" anchor="t" lIns="0" rIns="0" tIns="0" bIns="0">
-            <a:spAutoFit/>
-          </a:bodyPr>
-          <a:lstStyle/>
-          <a:p>
-            <a:pPr algn="l">
-              <a:lnSpc>
-                <a:spcPct val="135000"/>
-              </a:lnSpc>
-            </a:pPr>
-            <a:r>
-              <a:rPr sz="1100" b="1">
-                <a:solidFill>
-                  <a:srgbClr val="35D39A"/>
-                </a:solidFill>
-                <a:latin typeface="Microsoft YaHei"/>
-              </a:rPr>
-              <a:t>02</a:t>
+            <a:off x="2880360" y="2029968"/>
+            <a:ext cx="2029968" cy="457200"/>
+          </a:xfrm>
+          <a:prstGeom prst="rect">
+            <a:avLst/>
+          </a:prstGeom>
+          <a:noFill/>
+        </p:spPr>
+        <p:txBody>
+          <a:bodyPr wrap="square" anchor="t" lIns="0" rIns="0" tIns="0" bIns="0">
+            <a:spAutoFit/>
+          </a:bodyPr>
+          <a:lstStyle/>
+          <a:p>
+            <a:pPr algn="ctr">
+              <a:lnSpc>
+                <a:spcPct val="135000"/>
+              </a:lnSpc>
+            </a:pPr>
+            <a:r>
+              <a:rPr sz="2000" b="1">
+                <a:solidFill>
+                  <a:srgbClr val="FFB020"/>
+                </a:solidFill>
+                <a:latin typeface="Microsoft YaHei"/>
+              </a:rPr>
+              <a:t>28 / 22</a:t>
             </a:r>
           </a:p>
         </p:txBody>
@@ -5491,87 +5539,47 @@
         </p:nvSpPr>
         <p:spPr>
           <a:xfrm>
-            <a:off x="3410712" y="2340864"/>
-            <a:ext cx="2011680" cy="320040"/>
-          </a:xfrm>
-          <a:prstGeom prst="rect">
-            <a:avLst/>
-          </a:prstGeom>
-          <a:noFill/>
-        </p:spPr>
-        <p:txBody>
-          <a:bodyPr wrap="square" anchor="t" lIns="0" rIns="0" tIns="0" bIns="0">
-            <a:spAutoFit/>
-          </a:bodyPr>
-          <a:lstStyle/>
-          <a:p>
-            <a:pPr algn="l">
-              <a:lnSpc>
-                <a:spcPct val="135000"/>
-              </a:lnSpc>
-            </a:pPr>
-            <a:r>
-              <a:rPr sz="1700" b="1">
-                <a:solidFill>
-                  <a:srgbClr val="E8EEFB"/>
-                </a:solidFill>
-                <a:latin typeface="Microsoft YaHei"/>
-              </a:rPr>
-              <a:t>核验</a:t>
-            </a:r>
-          </a:p>
-        </p:txBody>
-      </p:sp>
-      <p:sp>
-        <p:nvSpPr>
-          <p:cNvPr id="12" name="TextBox 11"/>
-          <p:cNvSpPr txBox="1"/>
-          <p:nvPr/>
-        </p:nvSpPr>
-        <p:spPr>
-          <a:xfrm>
-            <a:off x="3410712" y="2743200"/>
-            <a:ext cx="2011680" cy="548640"/>
-          </a:xfrm>
-          <a:prstGeom prst="rect">
-            <a:avLst/>
-          </a:prstGeom>
-          <a:noFill/>
-        </p:spPr>
-        <p:txBody>
-          <a:bodyPr wrap="square" anchor="t" lIns="0" rIns="0" tIns="0" bIns="0">
-            <a:spAutoFit/>
-          </a:bodyPr>
-          <a:lstStyle/>
-          <a:p>
-            <a:pPr algn="l">
-              <a:lnSpc>
-                <a:spcPct val="145000"/>
-              </a:lnSpc>
-            </a:pPr>
-            <a:r>
-              <a:rPr sz="1000" b="0">
-                <a:solidFill>
-                  <a:srgbClr val="8EA3C4"/>
-                </a:solidFill>
-                <a:latin typeface="Microsoft YaHei"/>
-              </a:rPr>
-              <a:t>四层证据链
-2–4 秒出结论</a:t>
-            </a:r>
-          </a:p>
-        </p:txBody>
-      </p:sp>
-      <p:sp>
-        <p:nvSpPr>
-          <p:cNvPr id="13" name="Rounded Rectangle 12"/>
+            <a:off x="2880360" y="2542032"/>
+            <a:ext cx="2029968" cy="274320"/>
+          </a:xfrm>
+          <a:prstGeom prst="rect">
+            <a:avLst/>
+          </a:prstGeom>
+          <a:noFill/>
+        </p:spPr>
+        <p:txBody>
+          <a:bodyPr wrap="square" anchor="t" lIns="0" rIns="0" tIns="0" bIns="0">
+            <a:spAutoFit/>
+          </a:bodyPr>
+          <a:lstStyle/>
+          <a:p>
+            <a:pPr algn="ctr">
+              <a:lnSpc>
+                <a:spcPct val="135000"/>
+              </a:lnSpc>
+            </a:pPr>
+            <a:r>
+              <a:rPr sz="950" b="0">
+                <a:solidFill>
+                  <a:srgbClr val="5F7395"/>
+                </a:solidFill>
+                <a:latin typeface="Microsoft YaHei"/>
+              </a:rPr>
+              <a:t>伪造 / 真实</a:t>
+            </a:r>
+          </a:p>
+        </p:txBody>
+      </p:sp>
+      <p:sp>
+        <p:nvSpPr>
+          <p:cNvPr id="12" name="Rounded Rectangle 11"/>
           <p:cNvSpPr/>
           <p:nvPr/>
         </p:nvSpPr>
         <p:spPr>
           <a:xfrm>
-            <a:off x="5769864" y="1938528"/>
-            <a:ext cx="2331720" cy="1417320"/>
+            <a:off x="5074920" y="1938528"/>
+            <a:ext cx="2029968" cy="1051560"/>
           </a:xfrm>
           <a:prstGeom prst="roundRect">
             <a:avLst>
@@ -5611,132 +5619,92 @@
       </p:sp>
       <p:sp>
         <p:nvSpPr>
+          <p:cNvPr id="13" name="TextBox 12"/>
+          <p:cNvSpPr txBox="1"/>
+          <p:nvPr/>
+        </p:nvSpPr>
+        <p:spPr>
+          <a:xfrm>
+            <a:off x="5074920" y="2029968"/>
+            <a:ext cx="2029968" cy="457200"/>
+          </a:xfrm>
+          <a:prstGeom prst="rect">
+            <a:avLst/>
+          </a:prstGeom>
+          <a:noFill/>
+        </p:spPr>
+        <p:txBody>
+          <a:bodyPr wrap="square" anchor="t" lIns="0" rIns="0" tIns="0" bIns="0">
+            <a:spAutoFit/>
+          </a:bodyPr>
+          <a:lstStyle/>
+          <a:p>
+            <a:pPr algn="ctr">
+              <a:lnSpc>
+                <a:spcPct val="135000"/>
+              </a:lnSpc>
+            </a:pPr>
+            <a:r>
+              <a:rPr sz="2000" b="1">
+                <a:solidFill>
+                  <a:srgbClr val="35D39A"/>
+                </a:solidFill>
+                <a:latin typeface="Microsoft YaHei"/>
+              </a:rPr>
+              <a:t>0.77</a:t>
+            </a:r>
+          </a:p>
+        </p:txBody>
+      </p:sp>
+      <p:sp>
+        <p:nvSpPr>
           <p:cNvPr id="14" name="TextBox 13"/>
           <p:cNvSpPr txBox="1"/>
           <p:nvPr/>
         </p:nvSpPr>
         <p:spPr>
           <a:xfrm>
-            <a:off x="5952744" y="2066543"/>
-            <a:ext cx="2011680" cy="274320"/>
-          </a:xfrm>
-          <a:prstGeom prst="rect">
-            <a:avLst/>
-          </a:prstGeom>
-          <a:noFill/>
-        </p:spPr>
-        <p:txBody>
-          <a:bodyPr wrap="square" anchor="t" lIns="0" rIns="0" tIns="0" bIns="0">
-            <a:spAutoFit/>
-          </a:bodyPr>
-          <a:lstStyle/>
-          <a:p>
-            <a:pPr algn="l">
-              <a:lnSpc>
-                <a:spcPct val="135000"/>
-              </a:lnSpc>
-            </a:pPr>
-            <a:r>
-              <a:rPr sz="1100" b="1">
-                <a:solidFill>
-                  <a:srgbClr val="35D39A"/>
-                </a:solidFill>
-                <a:latin typeface="Microsoft YaHei"/>
-              </a:rPr>
-              <a:t>03</a:t>
-            </a:r>
-          </a:p>
-        </p:txBody>
-      </p:sp>
-      <p:sp>
-        <p:nvSpPr>
-          <p:cNvPr id="15" name="TextBox 14"/>
-          <p:cNvSpPr txBox="1"/>
-          <p:nvPr/>
-        </p:nvSpPr>
-        <p:spPr>
-          <a:xfrm>
-            <a:off x="5952744" y="2340864"/>
-            <a:ext cx="2011680" cy="320040"/>
-          </a:xfrm>
-          <a:prstGeom prst="rect">
-            <a:avLst/>
-          </a:prstGeom>
-          <a:noFill/>
-        </p:spPr>
-        <p:txBody>
-          <a:bodyPr wrap="square" anchor="t" lIns="0" rIns="0" tIns="0" bIns="0">
-            <a:spAutoFit/>
-          </a:bodyPr>
-          <a:lstStyle/>
-          <a:p>
-            <a:pPr algn="l">
-              <a:lnSpc>
-                <a:spcPct val="135000"/>
-              </a:lnSpc>
-            </a:pPr>
-            <a:r>
-              <a:rPr sz="1700" b="1">
-                <a:solidFill>
-                  <a:srgbClr val="E8EEFB"/>
-                </a:solidFill>
-                <a:latin typeface="Microsoft YaHei"/>
-              </a:rPr>
-              <a:t>分级</a:t>
-            </a:r>
-          </a:p>
-        </p:txBody>
-      </p:sp>
-      <p:sp>
-        <p:nvSpPr>
-          <p:cNvPr id="16" name="TextBox 15"/>
-          <p:cNvSpPr txBox="1"/>
-          <p:nvPr/>
-        </p:nvSpPr>
-        <p:spPr>
-          <a:xfrm>
-            <a:off x="5952744" y="2743200"/>
-            <a:ext cx="2011680" cy="548640"/>
-          </a:xfrm>
-          <a:prstGeom prst="rect">
-            <a:avLst/>
-          </a:prstGeom>
-          <a:noFill/>
-        </p:spPr>
-        <p:txBody>
-          <a:bodyPr wrap="square" anchor="t" lIns="0" rIns="0" tIns="0" bIns="0">
-            <a:spAutoFit/>
-          </a:bodyPr>
-          <a:lstStyle/>
-          <a:p>
-            <a:pPr algn="l">
-              <a:lnSpc>
-                <a:spcPct val="145000"/>
-              </a:lnSpc>
-            </a:pPr>
-            <a:r>
-              <a:rPr sz="1000" b="0">
-                <a:solidFill>
-                  <a:srgbClr val="8EA3C4"/>
-                </a:solidFill>
-                <a:latin typeface="Microsoft YaHei"/>
-              </a:rPr>
-              <a:t>高危下架
-中危限流</a:t>
-            </a:r>
-          </a:p>
-        </p:txBody>
-      </p:sp>
-      <p:sp>
-        <p:nvSpPr>
-          <p:cNvPr id="17" name="Rounded Rectangle 16"/>
+            <a:off x="5074920" y="2542032"/>
+            <a:ext cx="2029968" cy="274320"/>
+          </a:xfrm>
+          <a:prstGeom prst="rect">
+            <a:avLst/>
+          </a:prstGeom>
+          <a:noFill/>
+        </p:spPr>
+        <p:txBody>
+          <a:bodyPr wrap="square" anchor="t" lIns="0" rIns="0" tIns="0" bIns="0">
+            <a:spAutoFit/>
+          </a:bodyPr>
+          <a:lstStyle/>
+          <a:p>
+            <a:pPr algn="ctr">
+              <a:lnSpc>
+                <a:spcPct val="135000"/>
+              </a:lnSpc>
+            </a:pPr>
+            <a:r>
+              <a:rPr sz="950" b="0">
+                <a:solidFill>
+                  <a:srgbClr val="5F7395"/>
+                </a:solidFill>
+                <a:latin typeface="Microsoft YaHei"/>
+              </a:rPr>
+              <a:t>Precision</a:t>
+            </a:r>
+          </a:p>
+        </p:txBody>
+      </p:sp>
+      <p:sp>
+        <p:nvSpPr>
+          <p:cNvPr id="15" name="Rounded Rectangle 14"/>
           <p:cNvSpPr/>
           <p:nvPr/>
         </p:nvSpPr>
         <p:spPr>
           <a:xfrm>
-            <a:off x="8311896" y="1938528"/>
-            <a:ext cx="2331720" cy="1417320"/>
+            <a:off x="7269479" y="1938528"/>
+            <a:ext cx="2029968" cy="1051560"/>
           </a:xfrm>
           <a:prstGeom prst="roundRect">
             <a:avLst>
@@ -5776,132 +5744,92 @@
       </p:sp>
       <p:sp>
         <p:nvSpPr>
-          <p:cNvPr id="18" name="TextBox 17"/>
-          <p:cNvSpPr txBox="1"/>
-          <p:nvPr/>
-        </p:nvSpPr>
-        <p:spPr>
-          <a:xfrm>
-            <a:off x="8494776" y="2066543"/>
-            <a:ext cx="2011680" cy="274320"/>
-          </a:xfrm>
-          <a:prstGeom prst="rect">
-            <a:avLst/>
-          </a:prstGeom>
-          <a:noFill/>
-        </p:spPr>
-        <p:txBody>
-          <a:bodyPr wrap="square" anchor="t" lIns="0" rIns="0" tIns="0" bIns="0">
-            <a:spAutoFit/>
-          </a:bodyPr>
-          <a:lstStyle/>
-          <a:p>
-            <a:pPr algn="l">
-              <a:lnSpc>
-                <a:spcPct val="135000"/>
-              </a:lnSpc>
-            </a:pPr>
-            <a:r>
-              <a:rPr sz="1100" b="1">
-                <a:solidFill>
-                  <a:srgbClr val="35D39A"/>
-                </a:solidFill>
-                <a:latin typeface="Microsoft YaHei"/>
-              </a:rPr>
-              <a:t>04</a:t>
-            </a:r>
-          </a:p>
-        </p:txBody>
-      </p:sp>
-      <p:sp>
-        <p:nvSpPr>
-          <p:cNvPr id="19" name="TextBox 18"/>
-          <p:cNvSpPr txBox="1"/>
-          <p:nvPr/>
-        </p:nvSpPr>
-        <p:spPr>
-          <a:xfrm>
-            <a:off x="8494776" y="2340864"/>
-            <a:ext cx="2011680" cy="320040"/>
-          </a:xfrm>
-          <a:prstGeom prst="rect">
-            <a:avLst/>
-          </a:prstGeom>
-          <a:noFill/>
-        </p:spPr>
-        <p:txBody>
-          <a:bodyPr wrap="square" anchor="t" lIns="0" rIns="0" tIns="0" bIns="0">
-            <a:spAutoFit/>
-          </a:bodyPr>
-          <a:lstStyle/>
-          <a:p>
-            <a:pPr algn="l">
-              <a:lnSpc>
-                <a:spcPct val="135000"/>
-              </a:lnSpc>
-            </a:pPr>
-            <a:r>
-              <a:rPr sz="1700" b="1">
-                <a:solidFill>
-                  <a:srgbClr val="E8EEFB"/>
-                </a:solidFill>
-                <a:latin typeface="Microsoft YaHei"/>
-              </a:rPr>
-              <a:t>申诉</a:t>
-            </a:r>
-          </a:p>
-        </p:txBody>
-      </p:sp>
-      <p:sp>
-        <p:nvSpPr>
-          <p:cNvPr id="20" name="TextBox 19"/>
-          <p:cNvSpPr txBox="1"/>
-          <p:nvPr/>
-        </p:nvSpPr>
-        <p:spPr>
-          <a:xfrm>
-            <a:off x="8494776" y="2743200"/>
-            <a:ext cx="2011680" cy="548640"/>
-          </a:xfrm>
-          <a:prstGeom prst="rect">
-            <a:avLst/>
-          </a:prstGeom>
-          <a:noFill/>
-        </p:spPr>
-        <p:txBody>
-          <a:bodyPr wrap="square" anchor="t" lIns="0" rIns="0" tIns="0" bIns="0">
-            <a:spAutoFit/>
-          </a:bodyPr>
-          <a:lstStyle/>
-          <a:p>
-            <a:pPr algn="l">
-              <a:lnSpc>
-                <a:spcPct val="145000"/>
-              </a:lnSpc>
-            </a:pPr>
-            <a:r>
-              <a:rPr sz="1000" b="0">
-                <a:solidFill>
-                  <a:srgbClr val="8EA3C4"/>
-                </a:solidFill>
-                <a:latin typeface="Microsoft YaHei"/>
-              </a:rPr>
-              <a:t>证据包直接
-回传创作者</a:t>
-            </a:r>
-          </a:p>
-        </p:txBody>
-      </p:sp>
-      <p:sp>
-        <p:nvSpPr>
-          <p:cNvPr id="21" name="Rounded Rectangle 20"/>
+          <p:cNvPr id="16" name="TextBox 15"/>
+          <p:cNvSpPr txBox="1"/>
+          <p:nvPr/>
+        </p:nvSpPr>
+        <p:spPr>
+          <a:xfrm>
+            <a:off x="7269479" y="2029968"/>
+            <a:ext cx="2029968" cy="457200"/>
+          </a:xfrm>
+          <a:prstGeom prst="rect">
+            <a:avLst/>
+          </a:prstGeom>
+          <a:noFill/>
+        </p:spPr>
+        <p:txBody>
+          <a:bodyPr wrap="square" anchor="t" lIns="0" rIns="0" tIns="0" bIns="0">
+            <a:spAutoFit/>
+          </a:bodyPr>
+          <a:lstStyle/>
+          <a:p>
+            <a:pPr algn="ctr">
+              <a:lnSpc>
+                <a:spcPct val="135000"/>
+              </a:lnSpc>
+            </a:pPr>
+            <a:r>
+              <a:rPr sz="2000" b="1">
+                <a:solidFill>
+                  <a:srgbClr val="FF4D6D"/>
+                </a:solidFill>
+                <a:latin typeface="Microsoft YaHei"/>
+              </a:rPr>
+              <a:t>0.46</a:t>
+            </a:r>
+          </a:p>
+        </p:txBody>
+      </p:sp>
+      <p:sp>
+        <p:nvSpPr>
+          <p:cNvPr id="17" name="TextBox 16"/>
+          <p:cNvSpPr txBox="1"/>
+          <p:nvPr/>
+        </p:nvSpPr>
+        <p:spPr>
+          <a:xfrm>
+            <a:off x="7269479" y="2542032"/>
+            <a:ext cx="2029968" cy="274320"/>
+          </a:xfrm>
+          <a:prstGeom prst="rect">
+            <a:avLst/>
+          </a:prstGeom>
+          <a:noFill/>
+        </p:spPr>
+        <p:txBody>
+          <a:bodyPr wrap="square" anchor="t" lIns="0" rIns="0" tIns="0" bIns="0">
+            <a:spAutoFit/>
+          </a:bodyPr>
+          <a:lstStyle/>
+          <a:p>
+            <a:pPr algn="ctr">
+              <a:lnSpc>
+                <a:spcPct val="135000"/>
+              </a:lnSpc>
+            </a:pPr>
+            <a:r>
+              <a:rPr sz="950" b="0">
+                <a:solidFill>
+                  <a:srgbClr val="5F7395"/>
+                </a:solidFill>
+                <a:latin typeface="Microsoft YaHei"/>
+              </a:rPr>
+              <a:t>Recall</a:t>
+            </a:r>
+          </a:p>
+        </p:txBody>
+      </p:sp>
+      <p:sp>
+        <p:nvSpPr>
+          <p:cNvPr id="18" name="Rounded Rectangle 17"/>
           <p:cNvSpPr/>
           <p:nvPr/>
         </p:nvSpPr>
         <p:spPr>
           <a:xfrm>
-            <a:off x="685800" y="3749039"/>
-            <a:ext cx="3520440" cy="1371600"/>
+            <a:off x="9464040" y="1938528"/>
+            <a:ext cx="2029968" cy="1051560"/>
           </a:xfrm>
           <a:prstGeom prst="roundRect">
             <a:avLst>
@@ -5941,92 +5869,92 @@
       </p:sp>
       <p:sp>
         <p:nvSpPr>
-          <p:cNvPr id="22" name="TextBox 21"/>
-          <p:cNvSpPr txBox="1"/>
-          <p:nvPr/>
-        </p:nvSpPr>
-        <p:spPr>
-          <a:xfrm>
-            <a:off x="886968" y="3877056"/>
-            <a:ext cx="3108960" cy="320040"/>
-          </a:xfrm>
-          <a:prstGeom prst="rect">
-            <a:avLst/>
-          </a:prstGeom>
-          <a:noFill/>
-        </p:spPr>
-        <p:txBody>
-          <a:bodyPr wrap="square" anchor="t" lIns="0" rIns="0" tIns="0" bIns="0">
-            <a:spAutoFit/>
-          </a:bodyPr>
-          <a:lstStyle/>
-          <a:p>
-            <a:pPr algn="l">
-              <a:lnSpc>
-                <a:spcPct val="135000"/>
-              </a:lnSpc>
-            </a:pPr>
-            <a:r>
-              <a:rPr sz="1400" b="1">
-                <a:solidFill>
-                  <a:srgbClr val="4DA3FF"/>
-                </a:solidFill>
-                <a:latin typeface="Microsoft YaHei"/>
-              </a:rPr>
-              <a:t>对平台</a:t>
-            </a:r>
-          </a:p>
-        </p:txBody>
-      </p:sp>
-      <p:sp>
-        <p:nvSpPr>
-          <p:cNvPr id="23" name="TextBox 22"/>
-          <p:cNvSpPr txBox="1"/>
-          <p:nvPr/>
-        </p:nvSpPr>
-        <p:spPr>
-          <a:xfrm>
-            <a:off x="886968" y="4261104"/>
-            <a:ext cx="3108960" cy="777240"/>
-          </a:xfrm>
-          <a:prstGeom prst="rect">
-            <a:avLst/>
-          </a:prstGeom>
-          <a:noFill/>
-        </p:spPr>
-        <p:txBody>
-          <a:bodyPr wrap="square" anchor="t" lIns="0" rIns="0" tIns="0" bIns="0">
-            <a:spAutoFit/>
-          </a:bodyPr>
-          <a:lstStyle/>
-          <a:p>
-            <a:pPr algn="l">
-              <a:lnSpc>
-                <a:spcPct val="160000"/>
-              </a:lnSpc>
-            </a:pPr>
-            <a:r>
-              <a:rPr sz="1100" b="0">
-                <a:solidFill>
-                  <a:srgbClr val="8EA3C4"/>
-                </a:solidFill>
-                <a:latin typeface="Microsoft YaHei"/>
-              </a:rPr>
-              <a:t>审核效率提升，处置有据可依，减少误伤与舆情</a:t>
-            </a:r>
-          </a:p>
-        </p:txBody>
-      </p:sp>
-      <p:sp>
-        <p:nvSpPr>
-          <p:cNvPr id="24" name="Rounded Rectangle 23"/>
+          <p:cNvPr id="19" name="TextBox 18"/>
+          <p:cNvSpPr txBox="1"/>
+          <p:nvPr/>
+        </p:nvSpPr>
+        <p:spPr>
+          <a:xfrm>
+            <a:off x="9464040" y="2029968"/>
+            <a:ext cx="2029968" cy="457200"/>
+          </a:xfrm>
+          <a:prstGeom prst="rect">
+            <a:avLst/>
+          </a:prstGeom>
+          <a:noFill/>
+        </p:spPr>
+        <p:txBody>
+          <a:bodyPr wrap="square" anchor="t" lIns="0" rIns="0" tIns="0" bIns="0">
+            <a:spAutoFit/>
+          </a:bodyPr>
+          <a:lstStyle/>
+          <a:p>
+            <a:pPr algn="ctr">
+              <a:lnSpc>
+                <a:spcPct val="135000"/>
+              </a:lnSpc>
+            </a:pPr>
+            <a:r>
+              <a:rPr sz="2000" b="1">
+                <a:solidFill>
+                  <a:srgbClr val="7C6BF0"/>
+                </a:solidFill>
+                <a:latin typeface="Microsoft YaHei"/>
+              </a:rPr>
+              <a:t>0.23</a:t>
+            </a:r>
+          </a:p>
+        </p:txBody>
+      </p:sp>
+      <p:sp>
+        <p:nvSpPr>
+          <p:cNvPr id="20" name="TextBox 19"/>
+          <p:cNvSpPr txBox="1"/>
+          <p:nvPr/>
+        </p:nvSpPr>
+        <p:spPr>
+          <a:xfrm>
+            <a:off x="9464040" y="2542032"/>
+            <a:ext cx="2029968" cy="274320"/>
+          </a:xfrm>
+          <a:prstGeom prst="rect">
+            <a:avLst/>
+          </a:prstGeom>
+          <a:noFill/>
+        </p:spPr>
+        <p:txBody>
+          <a:bodyPr wrap="square" anchor="t" lIns="0" rIns="0" tIns="0" bIns="0">
+            <a:spAutoFit/>
+          </a:bodyPr>
+          <a:lstStyle/>
+          <a:p>
+            <a:pPr algn="ctr">
+              <a:lnSpc>
+                <a:spcPct val="135000"/>
+              </a:lnSpc>
+            </a:pPr>
+            <a:r>
+              <a:rPr sz="950" b="0">
+                <a:solidFill>
+                  <a:srgbClr val="5F7395"/>
+                </a:solidFill>
+                <a:latin typeface="Microsoft YaHei"/>
+              </a:rPr>
+              <a:t>定位 IoU</a:t>
+            </a:r>
+          </a:p>
+        </p:txBody>
+      </p:sp>
+      <p:sp>
+        <p:nvSpPr>
+          <p:cNvPr id="21" name="Rounded Rectangle 20"/>
           <p:cNvSpPr/>
           <p:nvPr/>
         </p:nvSpPr>
         <p:spPr>
           <a:xfrm>
-            <a:off x="4361688" y="3749039"/>
-            <a:ext cx="3520440" cy="1371600"/>
+            <a:off x="685800" y="3218688"/>
+            <a:ext cx="5394960" cy="1463040"/>
           </a:xfrm>
           <a:prstGeom prst="roundRect">
             <a:avLst>
@@ -6066,92 +5994,131 @@
       </p:sp>
       <p:sp>
         <p:nvSpPr>
-          <p:cNvPr id="25" name="TextBox 24"/>
-          <p:cNvSpPr txBox="1"/>
-          <p:nvPr/>
-        </p:nvSpPr>
-        <p:spPr>
-          <a:xfrm>
-            <a:off x="4562855" y="3877056"/>
-            <a:ext cx="3108960" cy="320040"/>
-          </a:xfrm>
-          <a:prstGeom prst="rect">
-            <a:avLst/>
-          </a:prstGeom>
-          <a:noFill/>
-        </p:spPr>
-        <p:txBody>
-          <a:bodyPr wrap="square" anchor="t" lIns="0" rIns="0" tIns="0" bIns="0">
-            <a:spAutoFit/>
-          </a:bodyPr>
-          <a:lstStyle/>
-          <a:p>
-            <a:pPr algn="l">
-              <a:lnSpc>
-                <a:spcPct val="135000"/>
-              </a:lnSpc>
-            </a:pPr>
-            <a:r>
-              <a:rPr sz="1400" b="1">
-                <a:solidFill>
-                  <a:srgbClr val="35D39A"/>
-                </a:solidFill>
-                <a:latin typeface="Microsoft YaHei"/>
-              </a:rPr>
-              <a:t>对品牌</a:t>
-            </a:r>
-          </a:p>
-        </p:txBody>
-      </p:sp>
-      <p:sp>
-        <p:nvSpPr>
-          <p:cNvPr id="26" name="TextBox 25"/>
-          <p:cNvSpPr txBox="1"/>
-          <p:nvPr/>
-        </p:nvSpPr>
-        <p:spPr>
-          <a:xfrm>
-            <a:off x="4562855" y="4261104"/>
-            <a:ext cx="3108960" cy="777240"/>
-          </a:xfrm>
-          <a:prstGeom prst="rect">
-            <a:avLst/>
-          </a:prstGeom>
-          <a:noFill/>
-        </p:spPr>
-        <p:txBody>
-          <a:bodyPr wrap="square" anchor="t" lIns="0" rIns="0" tIns="0" bIns="0">
-            <a:spAutoFit/>
-          </a:bodyPr>
-          <a:lstStyle/>
-          <a:p>
-            <a:pPr algn="l">
-              <a:lnSpc>
-                <a:spcPct val="160000"/>
-              </a:lnSpc>
-            </a:pPr>
-            <a:r>
-              <a:rPr sz="1100" b="0">
-                <a:solidFill>
-                  <a:srgbClr val="8EA3C4"/>
-                </a:solidFill>
-                <a:latin typeface="Microsoft YaHei"/>
-              </a:rPr>
-              <a:t>保护真实口碑不被水军稀释，掌握竞品造假证据</a:t>
-            </a:r>
-          </a:p>
-        </p:txBody>
-      </p:sp>
-      <p:sp>
-        <p:nvSpPr>
-          <p:cNvPr id="27" name="Rounded Rectangle 26"/>
+          <p:cNvPr id="22" name="TextBox 21"/>
+          <p:cNvSpPr txBox="1"/>
+          <p:nvPr/>
+        </p:nvSpPr>
+        <p:spPr>
+          <a:xfrm>
+            <a:off x="914400" y="3291840"/>
+            <a:ext cx="4937760" cy="320040"/>
+          </a:xfrm>
+          <a:prstGeom prst="rect">
+            <a:avLst/>
+          </a:prstGeom>
+          <a:noFill/>
+        </p:spPr>
+        <p:txBody>
+          <a:bodyPr wrap="square" anchor="t" lIns="0" rIns="0" tIns="0" bIns="0">
+            <a:spAutoFit/>
+          </a:bodyPr>
+          <a:lstStyle/>
+          <a:p>
+            <a:pPr algn="l">
+              <a:lnSpc>
+                <a:spcPct val="135000"/>
+              </a:lnSpc>
+            </a:pPr>
+            <a:r>
+              <a:rPr sz="1100" b="1">
+                <a:solidFill>
+                  <a:srgbClr val="5F7395"/>
+                </a:solidFill>
+                <a:latin typeface="Microsoft YaHei"/>
+              </a:rPr>
+              <a:t>分场景 F1</a:t>
+            </a:r>
+          </a:p>
+        </p:txBody>
+      </p:sp>
+      <p:sp>
+        <p:nvSpPr>
+          <p:cNvPr id="23" name="TextBox 22"/>
+          <p:cNvSpPr txBox="1"/>
+          <p:nvPr/>
+        </p:nvSpPr>
+        <p:spPr>
+          <a:xfrm>
+            <a:off x="914400" y="3657600"/>
+            <a:ext cx="4937760" cy="914400"/>
+          </a:xfrm>
+          <a:prstGeom prst="rect">
+            <a:avLst/>
+          </a:prstGeom>
+          <a:noFill/>
+        </p:spPr>
+        <p:txBody>
+          <a:bodyPr wrap="square" anchor="t" lIns="0" rIns="0" tIns="0" bIns="0">
+            <a:spAutoFit/>
+          </a:bodyPr>
+          <a:lstStyle/>
+          <a:p>
+            <a:pPr algn="l">
+              <a:lnSpc>
+                <a:spcPct val="135000"/>
+              </a:lnSpc>
+            </a:pPr>
+            <a:r>
+              <a:rPr sz="1500" b="1">
+                <a:solidFill>
+                  <a:srgbClr val="E8EEFB"/>
+                </a:solidFill>
+                <a:latin typeface="Microsoft YaHei"/>
+              </a:rPr>
+              <a:t>种草图文 0.63　·　评论区 0.93　·　AI 素材 0.00</a:t>
+            </a:r>
+          </a:p>
+        </p:txBody>
+      </p:sp>
+      <p:sp>
+        <p:nvSpPr>
+          <p:cNvPr id="24" name="TextBox 23"/>
+          <p:cNvSpPr txBox="1"/>
+          <p:nvPr/>
+        </p:nvSpPr>
+        <p:spPr>
+          <a:xfrm>
+            <a:off x="914400" y="4224528"/>
+            <a:ext cx="4937760" cy="365760"/>
+          </a:xfrm>
+          <a:prstGeom prst="rect">
+            <a:avLst/>
+          </a:prstGeom>
+          <a:noFill/>
+        </p:spPr>
+        <p:txBody>
+          <a:bodyPr wrap="square" anchor="t" lIns="0" rIns="0" tIns="0" bIns="0">
+            <a:spAutoFit/>
+          </a:bodyPr>
+          <a:lstStyle/>
+          <a:p>
+            <a:pPr algn="l">
+              <a:lnSpc>
+                <a:spcPct val="135000"/>
+              </a:lnSpc>
+            </a:pPr>
+            <a:r>
+              <a:rPr sz="950" b="0">
+                <a:solidFill>
+                  <a:srgbClr val="8A9BB8"/>
+                </a:solidFill>
+                <a:latin typeface="Microsoft YaHei"/>
+              </a:rPr>
+              <a:t>素材场景在自建集上没有区分度，只作辅助筛查，见下一页</a:t>
+            </a:r>
+          </a:p>
+        </p:txBody>
+      </p:sp>
+      <p:sp>
+        <p:nvSpPr>
+          <p:cNvPr id="25" name="Rounded Rectangle 24"/>
           <p:cNvSpPr/>
           <p:nvPr/>
         </p:nvSpPr>
         <p:spPr>
           <a:xfrm>
-            <a:off x="8037575" y="3749039"/>
-            <a:ext cx="3520440" cy="1371600"/>
+            <a:off x="6263640" y="3218688"/>
+            <a:ext cx="5212080" cy="1463040"/>
           </a:xfrm>
           <a:prstGeom prst="roundRect">
             <a:avLst>
@@ -6159,11 +6126,11 @@
             </a:avLst>
           </a:prstGeom>
           <a:solidFill>
-            <a:srgbClr val="131C30"/>
+            <a:srgbClr val="2A1218"/>
           </a:solidFill>
           <a:ln w="9525">
             <a:solidFill>
-              <a:srgbClr val="243656"/>
+              <a:srgbClr val="6B2233"/>
             </a:solidFill>
           </a:ln>
         </p:spPr>
@@ -6191,39 +6158,120 @@
       </p:sp>
       <p:sp>
         <p:nvSpPr>
+          <p:cNvPr id="26" name="TextBox 25"/>
+          <p:cNvSpPr txBox="1"/>
+          <p:nvPr/>
+        </p:nvSpPr>
+        <p:spPr>
+          <a:xfrm>
+            <a:off x="6492240" y="3291840"/>
+            <a:ext cx="4754880" cy="320040"/>
+          </a:xfrm>
+          <a:prstGeom prst="rect">
+            <a:avLst/>
+          </a:prstGeom>
+          <a:noFill/>
+        </p:spPr>
+        <p:txBody>
+          <a:bodyPr wrap="square" anchor="t" lIns="0" rIns="0" tIns="0" bIns="0">
+            <a:spAutoFit/>
+          </a:bodyPr>
+          <a:lstStyle/>
+          <a:p>
+            <a:pPr algn="l">
+              <a:lnSpc>
+                <a:spcPct val="135000"/>
+              </a:lnSpc>
+            </a:pPr>
+            <a:r>
+              <a:rPr sz="1100" b="1">
+                <a:solidFill>
+                  <a:srgbClr val="FF4D6D"/>
+                </a:solidFill>
+                <a:latin typeface="Microsoft YaHei"/>
+              </a:rPr>
+              <a:t>已知短板（不掩饰）</a:t>
+            </a:r>
+          </a:p>
+        </p:txBody>
+      </p:sp>
+      <p:sp>
+        <p:nvSpPr>
+          <p:cNvPr id="27" name="TextBox 26"/>
+          <p:cNvSpPr txBox="1"/>
+          <p:nvPr/>
+        </p:nvSpPr>
+        <p:spPr>
+          <a:xfrm>
+            <a:off x="6492240" y="3657600"/>
+            <a:ext cx="4754880" cy="914400"/>
+          </a:xfrm>
+          <a:prstGeom prst="rect">
+            <a:avLst/>
+          </a:prstGeom>
+          <a:noFill/>
+        </p:spPr>
+        <p:txBody>
+          <a:bodyPr wrap="square" anchor="t" lIns="0" rIns="0" tIns="0" bIns="0">
+            <a:spAutoFit/>
+          </a:bodyPr>
+          <a:lstStyle/>
+          <a:p>
+            <a:pPr algn="l">
+              <a:lnSpc>
+                <a:spcPct val="150000"/>
+              </a:lnSpc>
+            </a:pPr>
+            <a:r>
+              <a:rPr sz="1000" b="0">
+                <a:solidFill>
+                  <a:srgbClr val="E0B8C0"/>
+                </a:solidFill>
+                <a:latin typeface="Microsoft YaHei"/>
+              </a:rPr>
+              <a:t>早期 F1 是 0.69，其中素材场景的检出
+来自 ELA 的 z 分数退化（z=876445）；
+修正后如实回落到 0.58。</a:t>
+            </a:r>
+          </a:p>
+        </p:txBody>
+      </p:sp>
+      <p:sp>
+        <p:nvSpPr>
           <p:cNvPr id="28" name="TextBox 27"/>
           <p:cNvSpPr txBox="1"/>
           <p:nvPr/>
         </p:nvSpPr>
         <p:spPr>
           <a:xfrm>
-            <a:off x="8238744" y="3877056"/>
-            <a:ext cx="3108960" cy="320040"/>
-          </a:xfrm>
-          <a:prstGeom prst="rect">
-            <a:avLst/>
-          </a:prstGeom>
-          <a:noFill/>
-        </p:spPr>
-        <p:txBody>
-          <a:bodyPr wrap="square" anchor="t" lIns="0" rIns="0" tIns="0" bIns="0">
-            <a:spAutoFit/>
-          </a:bodyPr>
-          <a:lstStyle/>
-          <a:p>
-            <a:pPr algn="l">
-              <a:lnSpc>
-                <a:spcPct val="135000"/>
-              </a:lnSpc>
-            </a:pPr>
-            <a:r>
-              <a:rPr sz="1400" b="1">
-                <a:solidFill>
-                  <a:srgbClr val="FFB020"/>
-                </a:solidFill>
-                <a:latin typeface="Microsoft YaHei"/>
-              </a:rPr>
-              <a:t>对消费者</a:t>
+            <a:off x="685800" y="4892040"/>
+            <a:ext cx="10789920" cy="1234440"/>
+          </a:xfrm>
+          <a:prstGeom prst="rect">
+            <a:avLst/>
+          </a:prstGeom>
+          <a:noFill/>
+        </p:spPr>
+        <p:txBody>
+          <a:bodyPr wrap="square" anchor="t" lIns="0" rIns="0" tIns="0" bIns="0">
+            <a:spAutoFit/>
+          </a:bodyPr>
+          <a:lstStyle/>
+          <a:p>
+            <a:pPr algn="l">
+              <a:lnSpc>
+                <a:spcPct val="175000"/>
+              </a:lnSpc>
+            </a:pPr>
+            <a:r>
+              <a:rPr sz="1100" b="0">
+                <a:solidFill>
+                  <a:srgbClr val="8EA3C4"/>
+                </a:solidFill>
+                <a:latin typeface="Microsoft YaHei"/>
+              </a:rPr>
+              <a:t>评测方法：样本级 Precision / Recall 以 0.5 分为阈值；定位 IoU 用系统输出的可疑区域二值化后与 mask.png 对比。
+数据包里同时包含真实样本，就是为了检验系统会不会「见谁都像假的」——正是这一步暴露了上面的误报。</a:t>
             </a:r>
           </a:p>
         </p:txBody>
@@ -6231,84 +6279,6 @@
       <p:sp>
         <p:nvSpPr>
           <p:cNvPr id="29" name="TextBox 28"/>
-          <p:cNvSpPr txBox="1"/>
-          <p:nvPr/>
-        </p:nvSpPr>
-        <p:spPr>
-          <a:xfrm>
-            <a:off x="8238744" y="4261104"/>
-            <a:ext cx="3108960" cy="777240"/>
-          </a:xfrm>
-          <a:prstGeom prst="rect">
-            <a:avLst/>
-          </a:prstGeom>
-          <a:noFill/>
-        </p:spPr>
-        <p:txBody>
-          <a:bodyPr wrap="square" anchor="t" lIns="0" rIns="0" tIns="0" bIns="0">
-            <a:spAutoFit/>
-          </a:bodyPr>
-          <a:lstStyle/>
-          <a:p>
-            <a:pPr algn="l">
-              <a:lnSpc>
-                <a:spcPct val="160000"/>
-              </a:lnSpc>
-            </a:pPr>
-            <a:r>
-              <a:rPr sz="1100" b="0">
-                <a:solidFill>
-                  <a:srgbClr val="8EA3C4"/>
-                </a:solidFill>
-                <a:latin typeface="Microsoft YaHei"/>
-              </a:rPr>
-              <a:t>看到的内容有可信度标注，知道该不该信</a:t>
-            </a:r>
-          </a:p>
-        </p:txBody>
-      </p:sp>
-      <p:sp>
-        <p:nvSpPr>
-          <p:cNvPr id="30" name="TextBox 29"/>
-          <p:cNvSpPr txBox="1"/>
-          <p:nvPr/>
-        </p:nvSpPr>
-        <p:spPr>
-          <a:xfrm>
-            <a:off x="685800" y="5440680"/>
-            <a:ext cx="10789920" cy="731520"/>
-          </a:xfrm>
-          <a:prstGeom prst="rect">
-            <a:avLst/>
-          </a:prstGeom>
-          <a:noFill/>
-        </p:spPr>
-        <p:txBody>
-          <a:bodyPr wrap="square" anchor="t" lIns="0" rIns="0" tIns="0" bIns="0">
-            <a:spAutoFit/>
-          </a:bodyPr>
-          <a:lstStyle/>
-          <a:p>
-            <a:pPr algn="l">
-              <a:lnSpc>
-                <a:spcPct val="160000"/>
-              </a:lnSpc>
-            </a:pPr>
-            <a:r>
-              <a:rPr sz="1100" b="0">
-                <a:solidFill>
-                  <a:srgbClr val="5F7395"/>
-                </a:solidFill>
-                <a:latin typeface="Microsoft YaHei"/>
-              </a:rPr>
-              <a:t>合规是刚需：市场监管总局对化妆品功效宣称的专项整治一直在进行，平台侧的审核压力是真实存在的。</a:t>
-            </a:r>
-          </a:p>
-        </p:txBody>
-      </p:sp>
-      <p:sp>
-        <p:nvSpPr>
-          <p:cNvPr id="31" name="TextBox 30"/>
           <p:cNvSpPr txBox="1"/>
           <p:nvPr/>
         </p:nvSpPr>
@@ -6347,7 +6317,7 @@
       </p:sp>
       <p:sp>
         <p:nvSpPr>
-          <p:cNvPr id="32" name="TextBox 31"/>
+          <p:cNvPr id="30" name="TextBox 29"/>
           <p:cNvSpPr txBox="1"/>
           <p:nvPr/>
         </p:nvSpPr>
@@ -6479,7 +6449,7 @@
                 </a:solidFill>
                 <a:latin typeface="Microsoft YaHei"/>
               </a:rPr>
-              <a:t>11  未来规划</a:t>
+              <a:t>11  落地价值</a:t>
             </a:r>
           </a:p>
         </p:txBody>
@@ -6518,7 +6488,7 @@
                 </a:solidFill>
                 <a:latin typeface="Microsoft YaHei"/>
               </a:rPr>
-              <a:t>三条线把这个 Demo 变成产品</a:t>
+              <a:t>从「事后举报」变成「事前拦截」</a:t>
             </a:r>
           </a:p>
         </p:txBody>
@@ -6532,7 +6502,7 @@
         <p:spPr>
           <a:xfrm>
             <a:off x="685800" y="1938528"/>
-            <a:ext cx="3520440" cy="2971800"/>
+            <a:ext cx="2331720" cy="1417320"/>
           </a:xfrm>
           <a:prstGeom prst="roundRect">
             <a:avLst>
@@ -6578,8 +6548,8 @@
         </p:nvSpPr>
         <p:spPr>
           <a:xfrm>
-            <a:off x="914400" y="2103120"/>
-            <a:ext cx="3017520" cy="274320"/>
+            <a:off x="868680" y="2066543"/>
+            <a:ext cx="2011680" cy="274320"/>
           </a:xfrm>
           <a:prstGeom prst="rect">
             <a:avLst/>
@@ -6600,11 +6570,11 @@
             <a:r>
               <a:rPr sz="1100" b="1">
                 <a:solidFill>
-                  <a:srgbClr val="4DA3FF"/>
-                </a:solidFill>
-                <a:latin typeface="Microsoft YaHei"/>
-              </a:rPr>
-              <a:t>1–3 个月</a:t>
+                  <a:srgbClr val="35D39A"/>
+                </a:solidFill>
+                <a:latin typeface="Microsoft YaHei"/>
+              </a:rPr>
+              <a:t>01</a:t>
             </a:r>
           </a:p>
         </p:txBody>
@@ -6617,33 +6587,33 @@
         </p:nvSpPr>
         <p:spPr>
           <a:xfrm>
-            <a:off x="914400" y="2450592"/>
-            <a:ext cx="3017520" cy="411480"/>
-          </a:xfrm>
-          <a:prstGeom prst="rect">
-            <a:avLst/>
-          </a:prstGeom>
-          <a:noFill/>
-        </p:spPr>
-        <p:txBody>
-          <a:bodyPr wrap="square" anchor="t" lIns="0" rIns="0" tIns="0" bIns="0">
-            <a:spAutoFit/>
-          </a:bodyPr>
-          <a:lstStyle/>
-          <a:p>
-            <a:pPr algn="l">
-              <a:lnSpc>
-                <a:spcPct val="135000"/>
-              </a:lnSpc>
-            </a:pPr>
-            <a:r>
-              <a:rPr sz="1900" b="1">
+            <a:off x="868680" y="2340864"/>
+            <a:ext cx="2011680" cy="320040"/>
+          </a:xfrm>
+          <a:prstGeom prst="rect">
+            <a:avLst/>
+          </a:prstGeom>
+          <a:noFill/>
+        </p:spPr>
+        <p:txBody>
+          <a:bodyPr wrap="square" anchor="t" lIns="0" rIns="0" tIns="0" bIns="0">
+            <a:spAutoFit/>
+          </a:bodyPr>
+          <a:lstStyle/>
+          <a:p>
+            <a:pPr algn="l">
+              <a:lnSpc>
+                <a:spcPct val="135000"/>
+              </a:lnSpc>
+            </a:pPr>
+            <a:r>
+              <a:rPr sz="1700" b="1">
                 <a:solidFill>
                   <a:srgbClr val="E8EEFB"/>
                 </a:solidFill>
                 <a:latin typeface="Microsoft YaHei"/>
               </a:rPr>
-              <a:t>模型增强</a:t>
+              <a:t>抽检</a:t>
             </a:r>
           </a:p>
         </p:txBody>
@@ -6656,35 +6626,34 @@
         </p:nvSpPr>
         <p:spPr>
           <a:xfrm>
-            <a:off x="914400" y="2999232"/>
-            <a:ext cx="3063240" cy="1783080"/>
-          </a:xfrm>
-          <a:prstGeom prst="rect">
-            <a:avLst/>
-          </a:prstGeom>
-          <a:noFill/>
-        </p:spPr>
-        <p:txBody>
-          <a:bodyPr wrap="square" anchor="t" lIns="0" rIns="0" tIns="0" bIns="0">
-            <a:spAutoFit/>
-          </a:bodyPr>
-          <a:lstStyle/>
-          <a:p>
-            <a:pPr algn="l">
-              <a:lnSpc>
-                <a:spcPct val="185000"/>
-              </a:lnSpc>
-            </a:pPr>
-            <a:r>
-              <a:rPr sz="1100" b="0">
+            <a:off x="868680" y="2743200"/>
+            <a:ext cx="2011680" cy="548640"/>
+          </a:xfrm>
+          <a:prstGeom prst="rect">
+            <a:avLst/>
+          </a:prstGeom>
+          <a:noFill/>
+        </p:spPr>
+        <p:txBody>
+          <a:bodyPr wrap="square" anchor="t" lIns="0" rIns="0" tIns="0" bIns="0">
+            <a:spAutoFit/>
+          </a:bodyPr>
+          <a:lstStyle/>
+          <a:p>
+            <a:pPr algn="l">
+              <a:lnSpc>
+                <a:spcPct val="145000"/>
+              </a:lnSpc>
+            </a:pPr>
+            <a:r>
+              <a:rPr sz="1000" b="0">
                 <a:solidFill>
                   <a:srgbClr val="8EA3C4"/>
                 </a:solidFill>
                 <a:latin typeface="Microsoft YaHei"/>
               </a:rPr>
-              <a:t>接入开源预训练 AIGC 检测器做集成；
-引入 Qwen2.5-VL 做语义层复核；
-用真实平台数据做阈值标定。</a:t>
+              <a:t>每天 5% 内容
+自动过一遍</a:t>
             </a:r>
           </a:p>
         </p:txBody>
@@ -6697,8 +6666,8 @@
         </p:nvSpPr>
         <p:spPr>
           <a:xfrm>
-            <a:off x="4361688" y="1938528"/>
-            <a:ext cx="3520440" cy="2971800"/>
+            <a:off x="3227832" y="1938528"/>
+            <a:ext cx="2331720" cy="1417320"/>
           </a:xfrm>
           <a:prstGeom prst="roundRect">
             <a:avLst>
@@ -6744,8 +6713,8 @@
         </p:nvSpPr>
         <p:spPr>
           <a:xfrm>
-            <a:off x="4590288" y="2103120"/>
-            <a:ext cx="3017520" cy="274320"/>
+            <a:off x="3410712" y="2066543"/>
+            <a:ext cx="2011680" cy="274320"/>
           </a:xfrm>
           <a:prstGeom prst="rect">
             <a:avLst/>
@@ -6770,7 +6739,7 @@
                 </a:solidFill>
                 <a:latin typeface="Microsoft YaHei"/>
               </a:rPr>
-              <a:t>3–6 个月</a:t>
+              <a:t>02</a:t>
             </a:r>
           </a:p>
         </p:txBody>
@@ -6783,33 +6752,33 @@
         </p:nvSpPr>
         <p:spPr>
           <a:xfrm>
-            <a:off x="4590288" y="2450592"/>
-            <a:ext cx="3017520" cy="411480"/>
-          </a:xfrm>
-          <a:prstGeom prst="rect">
-            <a:avLst/>
-          </a:prstGeom>
-          <a:noFill/>
-        </p:spPr>
-        <p:txBody>
-          <a:bodyPr wrap="square" anchor="t" lIns="0" rIns="0" tIns="0" bIns="0">
-            <a:spAutoFit/>
-          </a:bodyPr>
-          <a:lstStyle/>
-          <a:p>
-            <a:pPr algn="l">
-              <a:lnSpc>
-                <a:spcPct val="135000"/>
-              </a:lnSpc>
-            </a:pPr>
-            <a:r>
-              <a:rPr sz="1900" b="1">
+            <a:off x="3410712" y="2340864"/>
+            <a:ext cx="2011680" cy="320040"/>
+          </a:xfrm>
+          <a:prstGeom prst="rect">
+            <a:avLst/>
+          </a:prstGeom>
+          <a:noFill/>
+        </p:spPr>
+        <p:txBody>
+          <a:bodyPr wrap="square" anchor="t" lIns="0" rIns="0" tIns="0" bIns="0">
+            <a:spAutoFit/>
+          </a:bodyPr>
+          <a:lstStyle/>
+          <a:p>
+            <a:pPr algn="l">
+              <a:lnSpc>
+                <a:spcPct val="135000"/>
+              </a:lnSpc>
+            </a:pPr>
+            <a:r>
+              <a:rPr sz="1700" b="1">
                 <a:solidFill>
                   <a:srgbClr val="E8EEFB"/>
                 </a:solidFill>
                 <a:latin typeface="Microsoft YaHei"/>
               </a:rPr>
-              <a:t>场景扩展</a:t>
+              <a:t>核验</a:t>
             </a:r>
           </a:p>
         </p:txBody>
@@ -6822,34 +6791,34 @@
         </p:nvSpPr>
         <p:spPr>
           <a:xfrm>
-            <a:off x="4590288" y="2999232"/>
-            <a:ext cx="3063240" cy="1783080"/>
-          </a:xfrm>
-          <a:prstGeom prst="rect">
-            <a:avLst/>
-          </a:prstGeom>
-          <a:noFill/>
-        </p:spPr>
-        <p:txBody>
-          <a:bodyPr wrap="square" anchor="t" lIns="0" rIns="0" tIns="0" bIns="0">
-            <a:spAutoFit/>
-          </a:bodyPr>
-          <a:lstStyle/>
-          <a:p>
-            <a:pPr algn="l">
-              <a:lnSpc>
-                <a:spcPct val="185000"/>
-              </a:lnSpc>
-            </a:pPr>
-            <a:r>
-              <a:rPr sz="1100" b="0">
+            <a:off x="3410712" y="2743200"/>
+            <a:ext cx="2011680" cy="548640"/>
+          </a:xfrm>
+          <a:prstGeom prst="rect">
+            <a:avLst/>
+          </a:prstGeom>
+          <a:noFill/>
+        </p:spPr>
+        <p:txBody>
+          <a:bodyPr wrap="square" anchor="t" lIns="0" rIns="0" tIns="0" bIns="0">
+            <a:spAutoFit/>
+          </a:bodyPr>
+          <a:lstStyle/>
+          <a:p>
+            <a:pPr algn="l">
+              <a:lnSpc>
+                <a:spcPct val="145000"/>
+              </a:lnSpc>
+            </a:pPr>
+            <a:r>
+              <a:rPr sz="1000" b="0">
                 <a:solidFill>
                   <a:srgbClr val="8EA3C4"/>
                 </a:solidFill>
                 <a:latin typeface="Microsoft YaHei"/>
               </a:rPr>
-              <a:t>从美妆扩到母婴、保健品等功效宣称密集品类；
-从图文扩到短视频帧级核验。</a:t>
+              <a:t>五维证据链
+2–4 秒出结论</a:t>
             </a:r>
           </a:p>
         </p:txBody>
@@ -6862,8 +6831,8 @@
         </p:nvSpPr>
         <p:spPr>
           <a:xfrm>
-            <a:off x="8037575" y="1938528"/>
-            <a:ext cx="3520440" cy="2971800"/>
+            <a:off x="5769864" y="1938528"/>
+            <a:ext cx="2331720" cy="1417320"/>
           </a:xfrm>
           <a:prstGeom prst="roundRect">
             <a:avLst>
@@ -6909,6 +6878,1298 @@
         </p:nvSpPr>
         <p:spPr>
           <a:xfrm>
+            <a:off x="5952744" y="2066543"/>
+            <a:ext cx="2011680" cy="274320"/>
+          </a:xfrm>
+          <a:prstGeom prst="rect">
+            <a:avLst/>
+          </a:prstGeom>
+          <a:noFill/>
+        </p:spPr>
+        <p:txBody>
+          <a:bodyPr wrap="square" anchor="t" lIns="0" rIns="0" tIns="0" bIns="0">
+            <a:spAutoFit/>
+          </a:bodyPr>
+          <a:lstStyle/>
+          <a:p>
+            <a:pPr algn="l">
+              <a:lnSpc>
+                <a:spcPct val="135000"/>
+              </a:lnSpc>
+            </a:pPr>
+            <a:r>
+              <a:rPr sz="1100" b="1">
+                <a:solidFill>
+                  <a:srgbClr val="35D39A"/>
+                </a:solidFill>
+                <a:latin typeface="Microsoft YaHei"/>
+              </a:rPr>
+              <a:t>03</a:t>
+            </a:r>
+          </a:p>
+        </p:txBody>
+      </p:sp>
+      <p:sp>
+        <p:nvSpPr>
+          <p:cNvPr id="15" name="TextBox 14"/>
+          <p:cNvSpPr txBox="1"/>
+          <p:nvPr/>
+        </p:nvSpPr>
+        <p:spPr>
+          <a:xfrm>
+            <a:off x="5952744" y="2340864"/>
+            <a:ext cx="2011680" cy="320040"/>
+          </a:xfrm>
+          <a:prstGeom prst="rect">
+            <a:avLst/>
+          </a:prstGeom>
+          <a:noFill/>
+        </p:spPr>
+        <p:txBody>
+          <a:bodyPr wrap="square" anchor="t" lIns="0" rIns="0" tIns="0" bIns="0">
+            <a:spAutoFit/>
+          </a:bodyPr>
+          <a:lstStyle/>
+          <a:p>
+            <a:pPr algn="l">
+              <a:lnSpc>
+                <a:spcPct val="135000"/>
+              </a:lnSpc>
+            </a:pPr>
+            <a:r>
+              <a:rPr sz="1700" b="1">
+                <a:solidFill>
+                  <a:srgbClr val="E8EEFB"/>
+                </a:solidFill>
+                <a:latin typeface="Microsoft YaHei"/>
+              </a:rPr>
+              <a:t>分级</a:t>
+            </a:r>
+          </a:p>
+        </p:txBody>
+      </p:sp>
+      <p:sp>
+        <p:nvSpPr>
+          <p:cNvPr id="16" name="TextBox 15"/>
+          <p:cNvSpPr txBox="1"/>
+          <p:nvPr/>
+        </p:nvSpPr>
+        <p:spPr>
+          <a:xfrm>
+            <a:off x="5952744" y="2743200"/>
+            <a:ext cx="2011680" cy="548640"/>
+          </a:xfrm>
+          <a:prstGeom prst="rect">
+            <a:avLst/>
+          </a:prstGeom>
+          <a:noFill/>
+        </p:spPr>
+        <p:txBody>
+          <a:bodyPr wrap="square" anchor="t" lIns="0" rIns="0" tIns="0" bIns="0">
+            <a:spAutoFit/>
+          </a:bodyPr>
+          <a:lstStyle/>
+          <a:p>
+            <a:pPr algn="l">
+              <a:lnSpc>
+                <a:spcPct val="145000"/>
+              </a:lnSpc>
+            </a:pPr>
+            <a:r>
+              <a:rPr sz="1000" b="0">
+                <a:solidFill>
+                  <a:srgbClr val="8EA3C4"/>
+                </a:solidFill>
+                <a:latin typeface="Microsoft YaHei"/>
+              </a:rPr>
+              <a:t>高危下架
+中危限流</a:t>
+            </a:r>
+          </a:p>
+        </p:txBody>
+      </p:sp>
+      <p:sp>
+        <p:nvSpPr>
+          <p:cNvPr id="17" name="Rounded Rectangle 16"/>
+          <p:cNvSpPr/>
+          <p:nvPr/>
+        </p:nvSpPr>
+        <p:spPr>
+          <a:xfrm>
+            <a:off x="8311896" y="1938528"/>
+            <a:ext cx="2331720" cy="1417320"/>
+          </a:xfrm>
+          <a:prstGeom prst="roundRect">
+            <a:avLst>
+              <a:gd name="adj" fmla="val 6000"/>
+            </a:avLst>
+          </a:prstGeom>
+          <a:solidFill>
+            <a:srgbClr val="131C30"/>
+          </a:solidFill>
+          <a:ln w="9525">
+            <a:solidFill>
+              <a:srgbClr val="243656"/>
+            </a:solidFill>
+          </a:ln>
+        </p:spPr>
+        <p:style>
+          <a:lnRef idx="1">
+            <a:schemeClr val="accent1"/>
+          </a:lnRef>
+          <a:fillRef idx="3">
+            <a:schemeClr val="accent1"/>
+          </a:fillRef>
+          <a:effectRef idx="2">
+            <a:schemeClr val="accent1"/>
+          </a:effectRef>
+          <a:fontRef idx="minor">
+            <a:schemeClr val="lt1"/>
+          </a:fontRef>
+        </p:style>
+        <p:txBody>
+          <a:bodyPr rtlCol="0" anchor="ctr"/>
+          <a:lstStyle/>
+          <a:p>
+            <a:pPr algn="ctr"/>
+          </a:p>
+        </p:txBody>
+      </p:sp>
+      <p:sp>
+        <p:nvSpPr>
+          <p:cNvPr id="18" name="TextBox 17"/>
+          <p:cNvSpPr txBox="1"/>
+          <p:nvPr/>
+        </p:nvSpPr>
+        <p:spPr>
+          <a:xfrm>
+            <a:off x="8494776" y="2066543"/>
+            <a:ext cx="2011680" cy="274320"/>
+          </a:xfrm>
+          <a:prstGeom prst="rect">
+            <a:avLst/>
+          </a:prstGeom>
+          <a:noFill/>
+        </p:spPr>
+        <p:txBody>
+          <a:bodyPr wrap="square" anchor="t" lIns="0" rIns="0" tIns="0" bIns="0">
+            <a:spAutoFit/>
+          </a:bodyPr>
+          <a:lstStyle/>
+          <a:p>
+            <a:pPr algn="l">
+              <a:lnSpc>
+                <a:spcPct val="135000"/>
+              </a:lnSpc>
+            </a:pPr>
+            <a:r>
+              <a:rPr sz="1100" b="1">
+                <a:solidFill>
+                  <a:srgbClr val="35D39A"/>
+                </a:solidFill>
+                <a:latin typeface="Microsoft YaHei"/>
+              </a:rPr>
+              <a:t>04</a:t>
+            </a:r>
+          </a:p>
+        </p:txBody>
+      </p:sp>
+      <p:sp>
+        <p:nvSpPr>
+          <p:cNvPr id="19" name="TextBox 18"/>
+          <p:cNvSpPr txBox="1"/>
+          <p:nvPr/>
+        </p:nvSpPr>
+        <p:spPr>
+          <a:xfrm>
+            <a:off x="8494776" y="2340864"/>
+            <a:ext cx="2011680" cy="320040"/>
+          </a:xfrm>
+          <a:prstGeom prst="rect">
+            <a:avLst/>
+          </a:prstGeom>
+          <a:noFill/>
+        </p:spPr>
+        <p:txBody>
+          <a:bodyPr wrap="square" anchor="t" lIns="0" rIns="0" tIns="0" bIns="0">
+            <a:spAutoFit/>
+          </a:bodyPr>
+          <a:lstStyle/>
+          <a:p>
+            <a:pPr algn="l">
+              <a:lnSpc>
+                <a:spcPct val="135000"/>
+              </a:lnSpc>
+            </a:pPr>
+            <a:r>
+              <a:rPr sz="1700" b="1">
+                <a:solidFill>
+                  <a:srgbClr val="E8EEFB"/>
+                </a:solidFill>
+                <a:latin typeface="Microsoft YaHei"/>
+              </a:rPr>
+              <a:t>申诉</a:t>
+            </a:r>
+          </a:p>
+        </p:txBody>
+      </p:sp>
+      <p:sp>
+        <p:nvSpPr>
+          <p:cNvPr id="20" name="TextBox 19"/>
+          <p:cNvSpPr txBox="1"/>
+          <p:nvPr/>
+        </p:nvSpPr>
+        <p:spPr>
+          <a:xfrm>
+            <a:off x="8494776" y="2743200"/>
+            <a:ext cx="2011680" cy="548640"/>
+          </a:xfrm>
+          <a:prstGeom prst="rect">
+            <a:avLst/>
+          </a:prstGeom>
+          <a:noFill/>
+        </p:spPr>
+        <p:txBody>
+          <a:bodyPr wrap="square" anchor="t" lIns="0" rIns="0" tIns="0" bIns="0">
+            <a:spAutoFit/>
+          </a:bodyPr>
+          <a:lstStyle/>
+          <a:p>
+            <a:pPr algn="l">
+              <a:lnSpc>
+                <a:spcPct val="145000"/>
+              </a:lnSpc>
+            </a:pPr>
+            <a:r>
+              <a:rPr sz="1000" b="0">
+                <a:solidFill>
+                  <a:srgbClr val="8EA3C4"/>
+                </a:solidFill>
+                <a:latin typeface="Microsoft YaHei"/>
+              </a:rPr>
+              <a:t>证据包直接
+回传创作者</a:t>
+            </a:r>
+          </a:p>
+        </p:txBody>
+      </p:sp>
+      <p:sp>
+        <p:nvSpPr>
+          <p:cNvPr id="21" name="Rounded Rectangle 20"/>
+          <p:cNvSpPr/>
+          <p:nvPr/>
+        </p:nvSpPr>
+        <p:spPr>
+          <a:xfrm>
+            <a:off x="685800" y="3749039"/>
+            <a:ext cx="3520440" cy="1371600"/>
+          </a:xfrm>
+          <a:prstGeom prst="roundRect">
+            <a:avLst>
+              <a:gd name="adj" fmla="val 6000"/>
+            </a:avLst>
+          </a:prstGeom>
+          <a:solidFill>
+            <a:srgbClr val="131C30"/>
+          </a:solidFill>
+          <a:ln w="9525">
+            <a:solidFill>
+              <a:srgbClr val="243656"/>
+            </a:solidFill>
+          </a:ln>
+        </p:spPr>
+        <p:style>
+          <a:lnRef idx="1">
+            <a:schemeClr val="accent1"/>
+          </a:lnRef>
+          <a:fillRef idx="3">
+            <a:schemeClr val="accent1"/>
+          </a:fillRef>
+          <a:effectRef idx="2">
+            <a:schemeClr val="accent1"/>
+          </a:effectRef>
+          <a:fontRef idx="minor">
+            <a:schemeClr val="lt1"/>
+          </a:fontRef>
+        </p:style>
+        <p:txBody>
+          <a:bodyPr rtlCol="0" anchor="ctr"/>
+          <a:lstStyle/>
+          <a:p>
+            <a:pPr algn="ctr"/>
+          </a:p>
+        </p:txBody>
+      </p:sp>
+      <p:sp>
+        <p:nvSpPr>
+          <p:cNvPr id="22" name="TextBox 21"/>
+          <p:cNvSpPr txBox="1"/>
+          <p:nvPr/>
+        </p:nvSpPr>
+        <p:spPr>
+          <a:xfrm>
+            <a:off x="886968" y="3877056"/>
+            <a:ext cx="3108960" cy="320040"/>
+          </a:xfrm>
+          <a:prstGeom prst="rect">
+            <a:avLst/>
+          </a:prstGeom>
+          <a:noFill/>
+        </p:spPr>
+        <p:txBody>
+          <a:bodyPr wrap="square" anchor="t" lIns="0" rIns="0" tIns="0" bIns="0">
+            <a:spAutoFit/>
+          </a:bodyPr>
+          <a:lstStyle/>
+          <a:p>
+            <a:pPr algn="l">
+              <a:lnSpc>
+                <a:spcPct val="135000"/>
+              </a:lnSpc>
+            </a:pPr>
+            <a:r>
+              <a:rPr sz="1400" b="1">
+                <a:solidFill>
+                  <a:srgbClr val="4DA3FF"/>
+                </a:solidFill>
+                <a:latin typeface="Microsoft YaHei"/>
+              </a:rPr>
+              <a:t>对平台</a:t>
+            </a:r>
+          </a:p>
+        </p:txBody>
+      </p:sp>
+      <p:sp>
+        <p:nvSpPr>
+          <p:cNvPr id="23" name="TextBox 22"/>
+          <p:cNvSpPr txBox="1"/>
+          <p:nvPr/>
+        </p:nvSpPr>
+        <p:spPr>
+          <a:xfrm>
+            <a:off x="886968" y="4261104"/>
+            <a:ext cx="3108960" cy="777240"/>
+          </a:xfrm>
+          <a:prstGeom prst="rect">
+            <a:avLst/>
+          </a:prstGeom>
+          <a:noFill/>
+        </p:spPr>
+        <p:txBody>
+          <a:bodyPr wrap="square" anchor="t" lIns="0" rIns="0" tIns="0" bIns="0">
+            <a:spAutoFit/>
+          </a:bodyPr>
+          <a:lstStyle/>
+          <a:p>
+            <a:pPr algn="l">
+              <a:lnSpc>
+                <a:spcPct val="160000"/>
+              </a:lnSpc>
+            </a:pPr>
+            <a:r>
+              <a:rPr sz="1100" b="0">
+                <a:solidFill>
+                  <a:srgbClr val="8EA3C4"/>
+                </a:solidFill>
+                <a:latin typeface="Microsoft YaHei"/>
+              </a:rPr>
+              <a:t>审核效率提升，处置有据可依，减少误伤与舆情</a:t>
+            </a:r>
+          </a:p>
+        </p:txBody>
+      </p:sp>
+      <p:sp>
+        <p:nvSpPr>
+          <p:cNvPr id="24" name="Rounded Rectangle 23"/>
+          <p:cNvSpPr/>
+          <p:nvPr/>
+        </p:nvSpPr>
+        <p:spPr>
+          <a:xfrm>
+            <a:off x="4361688" y="3749039"/>
+            <a:ext cx="3520440" cy="1371600"/>
+          </a:xfrm>
+          <a:prstGeom prst="roundRect">
+            <a:avLst>
+              <a:gd name="adj" fmla="val 6000"/>
+            </a:avLst>
+          </a:prstGeom>
+          <a:solidFill>
+            <a:srgbClr val="131C30"/>
+          </a:solidFill>
+          <a:ln w="9525">
+            <a:solidFill>
+              <a:srgbClr val="243656"/>
+            </a:solidFill>
+          </a:ln>
+        </p:spPr>
+        <p:style>
+          <a:lnRef idx="1">
+            <a:schemeClr val="accent1"/>
+          </a:lnRef>
+          <a:fillRef idx="3">
+            <a:schemeClr val="accent1"/>
+          </a:fillRef>
+          <a:effectRef idx="2">
+            <a:schemeClr val="accent1"/>
+          </a:effectRef>
+          <a:fontRef idx="minor">
+            <a:schemeClr val="lt1"/>
+          </a:fontRef>
+        </p:style>
+        <p:txBody>
+          <a:bodyPr rtlCol="0" anchor="ctr"/>
+          <a:lstStyle/>
+          <a:p>
+            <a:pPr algn="ctr"/>
+          </a:p>
+        </p:txBody>
+      </p:sp>
+      <p:sp>
+        <p:nvSpPr>
+          <p:cNvPr id="25" name="TextBox 24"/>
+          <p:cNvSpPr txBox="1"/>
+          <p:nvPr/>
+        </p:nvSpPr>
+        <p:spPr>
+          <a:xfrm>
+            <a:off x="4562855" y="3877056"/>
+            <a:ext cx="3108960" cy="320040"/>
+          </a:xfrm>
+          <a:prstGeom prst="rect">
+            <a:avLst/>
+          </a:prstGeom>
+          <a:noFill/>
+        </p:spPr>
+        <p:txBody>
+          <a:bodyPr wrap="square" anchor="t" lIns="0" rIns="0" tIns="0" bIns="0">
+            <a:spAutoFit/>
+          </a:bodyPr>
+          <a:lstStyle/>
+          <a:p>
+            <a:pPr algn="l">
+              <a:lnSpc>
+                <a:spcPct val="135000"/>
+              </a:lnSpc>
+            </a:pPr>
+            <a:r>
+              <a:rPr sz="1400" b="1">
+                <a:solidFill>
+                  <a:srgbClr val="35D39A"/>
+                </a:solidFill>
+                <a:latin typeface="Microsoft YaHei"/>
+              </a:rPr>
+              <a:t>对品牌</a:t>
+            </a:r>
+          </a:p>
+        </p:txBody>
+      </p:sp>
+      <p:sp>
+        <p:nvSpPr>
+          <p:cNvPr id="26" name="TextBox 25"/>
+          <p:cNvSpPr txBox="1"/>
+          <p:nvPr/>
+        </p:nvSpPr>
+        <p:spPr>
+          <a:xfrm>
+            <a:off x="4562855" y="4261104"/>
+            <a:ext cx="3108960" cy="777240"/>
+          </a:xfrm>
+          <a:prstGeom prst="rect">
+            <a:avLst/>
+          </a:prstGeom>
+          <a:noFill/>
+        </p:spPr>
+        <p:txBody>
+          <a:bodyPr wrap="square" anchor="t" lIns="0" rIns="0" tIns="0" bIns="0">
+            <a:spAutoFit/>
+          </a:bodyPr>
+          <a:lstStyle/>
+          <a:p>
+            <a:pPr algn="l">
+              <a:lnSpc>
+                <a:spcPct val="160000"/>
+              </a:lnSpc>
+            </a:pPr>
+            <a:r>
+              <a:rPr sz="1100" b="0">
+                <a:solidFill>
+                  <a:srgbClr val="8EA3C4"/>
+                </a:solidFill>
+                <a:latin typeface="Microsoft YaHei"/>
+              </a:rPr>
+              <a:t>保护真实口碑不被水军稀释，掌握竞品造假证据</a:t>
+            </a:r>
+          </a:p>
+        </p:txBody>
+      </p:sp>
+      <p:sp>
+        <p:nvSpPr>
+          <p:cNvPr id="27" name="Rounded Rectangle 26"/>
+          <p:cNvSpPr/>
+          <p:nvPr/>
+        </p:nvSpPr>
+        <p:spPr>
+          <a:xfrm>
+            <a:off x="8037575" y="3749039"/>
+            <a:ext cx="3520440" cy="1371600"/>
+          </a:xfrm>
+          <a:prstGeom prst="roundRect">
+            <a:avLst>
+              <a:gd name="adj" fmla="val 6000"/>
+            </a:avLst>
+          </a:prstGeom>
+          <a:solidFill>
+            <a:srgbClr val="131C30"/>
+          </a:solidFill>
+          <a:ln w="9525">
+            <a:solidFill>
+              <a:srgbClr val="243656"/>
+            </a:solidFill>
+          </a:ln>
+        </p:spPr>
+        <p:style>
+          <a:lnRef idx="1">
+            <a:schemeClr val="accent1"/>
+          </a:lnRef>
+          <a:fillRef idx="3">
+            <a:schemeClr val="accent1"/>
+          </a:fillRef>
+          <a:effectRef idx="2">
+            <a:schemeClr val="accent1"/>
+          </a:effectRef>
+          <a:fontRef idx="minor">
+            <a:schemeClr val="lt1"/>
+          </a:fontRef>
+        </p:style>
+        <p:txBody>
+          <a:bodyPr rtlCol="0" anchor="ctr"/>
+          <a:lstStyle/>
+          <a:p>
+            <a:pPr algn="ctr"/>
+          </a:p>
+        </p:txBody>
+      </p:sp>
+      <p:sp>
+        <p:nvSpPr>
+          <p:cNvPr id="28" name="TextBox 27"/>
+          <p:cNvSpPr txBox="1"/>
+          <p:nvPr/>
+        </p:nvSpPr>
+        <p:spPr>
+          <a:xfrm>
+            <a:off x="8238744" y="3877056"/>
+            <a:ext cx="3108960" cy="320040"/>
+          </a:xfrm>
+          <a:prstGeom prst="rect">
+            <a:avLst/>
+          </a:prstGeom>
+          <a:noFill/>
+        </p:spPr>
+        <p:txBody>
+          <a:bodyPr wrap="square" anchor="t" lIns="0" rIns="0" tIns="0" bIns="0">
+            <a:spAutoFit/>
+          </a:bodyPr>
+          <a:lstStyle/>
+          <a:p>
+            <a:pPr algn="l">
+              <a:lnSpc>
+                <a:spcPct val="135000"/>
+              </a:lnSpc>
+            </a:pPr>
+            <a:r>
+              <a:rPr sz="1400" b="1">
+                <a:solidFill>
+                  <a:srgbClr val="FFB020"/>
+                </a:solidFill>
+                <a:latin typeface="Microsoft YaHei"/>
+              </a:rPr>
+              <a:t>对消费者</a:t>
+            </a:r>
+          </a:p>
+        </p:txBody>
+      </p:sp>
+      <p:sp>
+        <p:nvSpPr>
+          <p:cNvPr id="29" name="TextBox 28"/>
+          <p:cNvSpPr txBox="1"/>
+          <p:nvPr/>
+        </p:nvSpPr>
+        <p:spPr>
+          <a:xfrm>
+            <a:off x="8238744" y="4261104"/>
+            <a:ext cx="3108960" cy="777240"/>
+          </a:xfrm>
+          <a:prstGeom prst="rect">
+            <a:avLst/>
+          </a:prstGeom>
+          <a:noFill/>
+        </p:spPr>
+        <p:txBody>
+          <a:bodyPr wrap="square" anchor="t" lIns="0" rIns="0" tIns="0" bIns="0">
+            <a:spAutoFit/>
+          </a:bodyPr>
+          <a:lstStyle/>
+          <a:p>
+            <a:pPr algn="l">
+              <a:lnSpc>
+                <a:spcPct val="160000"/>
+              </a:lnSpc>
+            </a:pPr>
+            <a:r>
+              <a:rPr sz="1100" b="0">
+                <a:solidFill>
+                  <a:srgbClr val="8EA3C4"/>
+                </a:solidFill>
+                <a:latin typeface="Microsoft YaHei"/>
+              </a:rPr>
+              <a:t>看到的内容有可信度标注，知道该不该信</a:t>
+            </a:r>
+          </a:p>
+        </p:txBody>
+      </p:sp>
+      <p:sp>
+        <p:nvSpPr>
+          <p:cNvPr id="30" name="TextBox 29"/>
+          <p:cNvSpPr txBox="1"/>
+          <p:nvPr/>
+        </p:nvSpPr>
+        <p:spPr>
+          <a:xfrm>
+            <a:off x="685800" y="5440680"/>
+            <a:ext cx="10789920" cy="731520"/>
+          </a:xfrm>
+          <a:prstGeom prst="rect">
+            <a:avLst/>
+          </a:prstGeom>
+          <a:noFill/>
+        </p:spPr>
+        <p:txBody>
+          <a:bodyPr wrap="square" anchor="t" lIns="0" rIns="0" tIns="0" bIns="0">
+            <a:spAutoFit/>
+          </a:bodyPr>
+          <a:lstStyle/>
+          <a:p>
+            <a:pPr algn="l">
+              <a:lnSpc>
+                <a:spcPct val="160000"/>
+              </a:lnSpc>
+            </a:pPr>
+            <a:r>
+              <a:rPr sz="1100" b="0">
+                <a:solidFill>
+                  <a:srgbClr val="5F7395"/>
+                </a:solidFill>
+                <a:latin typeface="Microsoft YaHei"/>
+              </a:rPr>
+              <a:t>合规是刚需：市场监管总局对化妆品功效宣称的专项整治一直在进行，平台侧的审核压力是真实存在的。</a:t>
+            </a:r>
+          </a:p>
+        </p:txBody>
+      </p:sp>
+      <p:sp>
+        <p:nvSpPr>
+          <p:cNvPr id="31" name="TextBox 30"/>
+          <p:cNvSpPr txBox="1"/>
+          <p:nvPr/>
+        </p:nvSpPr>
+        <p:spPr>
+          <a:xfrm>
+            <a:off x="685800" y="6419088"/>
+            <a:ext cx="5486400" cy="274320"/>
+          </a:xfrm>
+          <a:prstGeom prst="rect">
+            <a:avLst/>
+          </a:prstGeom>
+          <a:noFill/>
+        </p:spPr>
+        <p:txBody>
+          <a:bodyPr wrap="square" anchor="t" lIns="0" rIns="0" tIns="0" bIns="0">
+            <a:spAutoFit/>
+          </a:bodyPr>
+          <a:lstStyle/>
+          <a:p>
+            <a:pPr algn="l">
+              <a:lnSpc>
+                <a:spcPct val="135000"/>
+              </a:lnSpc>
+            </a:pPr>
+            <a:r>
+              <a:rPr sz="900" b="0">
+                <a:solidFill>
+                  <a:srgbClr val="5F7395"/>
+                </a:solidFill>
+                <a:latin typeface="Microsoft YaHei"/>
+              </a:rPr>
+              <a:t>信任守护师 · 欧莱雅第二届美妆科技黑客松 · 赛题2</a:t>
+            </a:r>
+          </a:p>
+        </p:txBody>
+      </p:sp>
+      <p:sp>
+        <p:nvSpPr>
+          <p:cNvPr id="32" name="TextBox 31"/>
+          <p:cNvSpPr txBox="1"/>
+          <p:nvPr/>
+        </p:nvSpPr>
+        <p:spPr>
+          <a:xfrm>
+            <a:off x="10607040" y="6419088"/>
+            <a:ext cx="914400" cy="274320"/>
+          </a:xfrm>
+          <a:prstGeom prst="rect">
+            <a:avLst/>
+          </a:prstGeom>
+          <a:noFill/>
+        </p:spPr>
+        <p:txBody>
+          <a:bodyPr wrap="square" anchor="t" lIns="0" rIns="0" tIns="0" bIns="0">
+            <a:spAutoFit/>
+          </a:bodyPr>
+          <a:lstStyle/>
+          <a:p>
+            <a:pPr algn="r">
+              <a:lnSpc>
+                <a:spcPct val="135000"/>
+              </a:lnSpc>
+            </a:pPr>
+            <a:r>
+              <a:rPr sz="900" b="0">
+                <a:solidFill>
+                  <a:srgbClr val="5F7395"/>
+                </a:solidFill>
+                <a:latin typeface="Microsoft YaHei"/>
+              </a:rPr>
+              <a:t>12</a:t>
+            </a:r>
+          </a:p>
+        </p:txBody>
+      </p:sp>
+    </p:spTree>
+  </p:cSld>
+  <p:clrMapOvr>
+    <a:masterClrMapping/>
+  </p:clrMapOvr>
+</p:sld>
+</file>
+
+<file path=ppt/slides/slide13.xml><?xml version="1.0" encoding="utf-8"?>
+<p:sld xmlns:a="http://schemas.openxmlformats.org/drawingml/2006/main" xmlns:p="http://schemas.openxmlformats.org/presentationml/2006/main" xmlns:r="http://schemas.openxmlformats.org/officeDocument/2006/relationships">
+  <p:cSld>
+    <p:spTree>
+      <p:nvGrpSpPr>
+        <p:cNvPr id="1" name=""/>
+        <p:cNvGrpSpPr/>
+        <p:nvPr/>
+      </p:nvGrpSpPr>
+      <p:grpSpPr/>
+      <p:sp>
+        <p:nvSpPr>
+          <p:cNvPr id="2" name="Rectangle 1"/>
+          <p:cNvSpPr/>
+          <p:nvPr/>
+        </p:nvSpPr>
+        <p:spPr>
+          <a:xfrm>
+            <a:off x="0" y="0"/>
+            <a:ext cx="12191695" cy="6858000"/>
+          </a:xfrm>
+          <a:prstGeom prst="rect">
+            <a:avLst/>
+          </a:prstGeom>
+          <a:solidFill>
+            <a:srgbClr val="0A0F1C"/>
+          </a:solidFill>
+          <a:ln>
+            <a:noFill/>
+          </a:ln>
+        </p:spPr>
+        <p:style>
+          <a:lnRef idx="1">
+            <a:schemeClr val="accent1"/>
+          </a:lnRef>
+          <a:fillRef idx="3">
+            <a:schemeClr val="accent1"/>
+          </a:fillRef>
+          <a:effectRef idx="2">
+            <a:schemeClr val="accent1"/>
+          </a:effectRef>
+          <a:fontRef idx="minor">
+            <a:schemeClr val="lt1"/>
+          </a:fontRef>
+        </p:style>
+        <p:txBody>
+          <a:bodyPr rtlCol="0" anchor="ctr"/>
+          <a:lstStyle/>
+          <a:p>
+            <a:pPr algn="ctr"/>
+          </a:p>
+        </p:txBody>
+      </p:sp>
+      <p:sp>
+        <p:nvSpPr>
+          <p:cNvPr id="3" name="TextBox 2"/>
+          <p:cNvSpPr txBox="1"/>
+          <p:nvPr/>
+        </p:nvSpPr>
+        <p:spPr>
+          <a:xfrm>
+            <a:off x="685800" y="502920"/>
+            <a:ext cx="7315200" cy="320040"/>
+          </a:xfrm>
+          <a:prstGeom prst="rect">
+            <a:avLst/>
+          </a:prstGeom>
+          <a:noFill/>
+        </p:spPr>
+        <p:txBody>
+          <a:bodyPr wrap="square" anchor="t" lIns="0" rIns="0" tIns="0" bIns="0">
+            <a:spAutoFit/>
+          </a:bodyPr>
+          <a:lstStyle/>
+          <a:p>
+            <a:pPr algn="l">
+              <a:lnSpc>
+                <a:spcPct val="135000"/>
+              </a:lnSpc>
+            </a:pPr>
+            <a:r>
+              <a:rPr sz="1200" b="1">
+                <a:solidFill>
+                  <a:srgbClr val="4DA3FF"/>
+                </a:solidFill>
+                <a:latin typeface="Microsoft YaHei"/>
+              </a:rPr>
+              <a:t>12  未来规划</a:t>
+            </a:r>
+          </a:p>
+        </p:txBody>
+      </p:sp>
+      <p:sp>
+        <p:nvSpPr>
+          <p:cNvPr id="4" name="TextBox 3"/>
+          <p:cNvSpPr txBox="1"/>
+          <p:nvPr/>
+        </p:nvSpPr>
+        <p:spPr>
+          <a:xfrm>
+            <a:off x="685800" y="841248"/>
+            <a:ext cx="10789920" cy="822960"/>
+          </a:xfrm>
+          <a:prstGeom prst="rect">
+            <a:avLst/>
+          </a:prstGeom>
+          <a:noFill/>
+        </p:spPr>
+        <p:txBody>
+          <a:bodyPr wrap="square" anchor="t" lIns="0" rIns="0" tIns="0" bIns="0">
+            <a:spAutoFit/>
+          </a:bodyPr>
+          <a:lstStyle/>
+          <a:p>
+            <a:pPr algn="l">
+              <a:lnSpc>
+                <a:spcPct val="135000"/>
+              </a:lnSpc>
+            </a:pPr>
+            <a:r>
+              <a:rPr sz="3200" b="1">
+                <a:solidFill>
+                  <a:srgbClr val="E8EEFB"/>
+                </a:solidFill>
+                <a:latin typeface="Microsoft YaHei"/>
+              </a:rPr>
+              <a:t>三条线把这个 Demo 变成产品</a:t>
+            </a:r>
+          </a:p>
+        </p:txBody>
+      </p:sp>
+      <p:sp>
+        <p:nvSpPr>
+          <p:cNvPr id="5" name="Rounded Rectangle 4"/>
+          <p:cNvSpPr/>
+          <p:nvPr/>
+        </p:nvSpPr>
+        <p:spPr>
+          <a:xfrm>
+            <a:off x="685800" y="1938528"/>
+            <a:ext cx="3520440" cy="2971800"/>
+          </a:xfrm>
+          <a:prstGeom prst="roundRect">
+            <a:avLst>
+              <a:gd name="adj" fmla="val 6000"/>
+            </a:avLst>
+          </a:prstGeom>
+          <a:solidFill>
+            <a:srgbClr val="131C30"/>
+          </a:solidFill>
+          <a:ln w="9525">
+            <a:solidFill>
+              <a:srgbClr val="243656"/>
+            </a:solidFill>
+          </a:ln>
+        </p:spPr>
+        <p:style>
+          <a:lnRef idx="1">
+            <a:schemeClr val="accent1"/>
+          </a:lnRef>
+          <a:fillRef idx="3">
+            <a:schemeClr val="accent1"/>
+          </a:fillRef>
+          <a:effectRef idx="2">
+            <a:schemeClr val="accent1"/>
+          </a:effectRef>
+          <a:fontRef idx="minor">
+            <a:schemeClr val="lt1"/>
+          </a:fontRef>
+        </p:style>
+        <p:txBody>
+          <a:bodyPr rtlCol="0" anchor="ctr"/>
+          <a:lstStyle/>
+          <a:p>
+            <a:pPr algn="ctr"/>
+          </a:p>
+        </p:txBody>
+      </p:sp>
+      <p:sp>
+        <p:nvSpPr>
+          <p:cNvPr id="6" name="TextBox 5"/>
+          <p:cNvSpPr txBox="1"/>
+          <p:nvPr/>
+        </p:nvSpPr>
+        <p:spPr>
+          <a:xfrm>
+            <a:off x="914400" y="2103120"/>
+            <a:ext cx="3017520" cy="274320"/>
+          </a:xfrm>
+          <a:prstGeom prst="rect">
+            <a:avLst/>
+          </a:prstGeom>
+          <a:noFill/>
+        </p:spPr>
+        <p:txBody>
+          <a:bodyPr wrap="square" anchor="t" lIns="0" rIns="0" tIns="0" bIns="0">
+            <a:spAutoFit/>
+          </a:bodyPr>
+          <a:lstStyle/>
+          <a:p>
+            <a:pPr algn="l">
+              <a:lnSpc>
+                <a:spcPct val="135000"/>
+              </a:lnSpc>
+            </a:pPr>
+            <a:r>
+              <a:rPr sz="1100" b="1">
+                <a:solidFill>
+                  <a:srgbClr val="4DA3FF"/>
+                </a:solidFill>
+                <a:latin typeface="Microsoft YaHei"/>
+              </a:rPr>
+              <a:t>1–3 个月</a:t>
+            </a:r>
+          </a:p>
+        </p:txBody>
+      </p:sp>
+      <p:sp>
+        <p:nvSpPr>
+          <p:cNvPr id="7" name="TextBox 6"/>
+          <p:cNvSpPr txBox="1"/>
+          <p:nvPr/>
+        </p:nvSpPr>
+        <p:spPr>
+          <a:xfrm>
+            <a:off x="914400" y="2450592"/>
+            <a:ext cx="3017520" cy="411480"/>
+          </a:xfrm>
+          <a:prstGeom prst="rect">
+            <a:avLst/>
+          </a:prstGeom>
+          <a:noFill/>
+        </p:spPr>
+        <p:txBody>
+          <a:bodyPr wrap="square" anchor="t" lIns="0" rIns="0" tIns="0" bIns="0">
+            <a:spAutoFit/>
+          </a:bodyPr>
+          <a:lstStyle/>
+          <a:p>
+            <a:pPr algn="l">
+              <a:lnSpc>
+                <a:spcPct val="135000"/>
+              </a:lnSpc>
+            </a:pPr>
+            <a:r>
+              <a:rPr sz="1900" b="1">
+                <a:solidFill>
+                  <a:srgbClr val="E8EEFB"/>
+                </a:solidFill>
+                <a:latin typeface="Microsoft YaHei"/>
+              </a:rPr>
+              <a:t>模型增强</a:t>
+            </a:r>
+          </a:p>
+        </p:txBody>
+      </p:sp>
+      <p:sp>
+        <p:nvSpPr>
+          <p:cNvPr id="8" name="TextBox 7"/>
+          <p:cNvSpPr txBox="1"/>
+          <p:nvPr/>
+        </p:nvSpPr>
+        <p:spPr>
+          <a:xfrm>
+            <a:off x="914400" y="2999232"/>
+            <a:ext cx="3063240" cy="1783080"/>
+          </a:xfrm>
+          <a:prstGeom prst="rect">
+            <a:avLst/>
+          </a:prstGeom>
+          <a:noFill/>
+        </p:spPr>
+        <p:txBody>
+          <a:bodyPr wrap="square" anchor="t" lIns="0" rIns="0" tIns="0" bIns="0">
+            <a:spAutoFit/>
+          </a:bodyPr>
+          <a:lstStyle/>
+          <a:p>
+            <a:pPr algn="l">
+              <a:lnSpc>
+                <a:spcPct val="185000"/>
+              </a:lnSpc>
+            </a:pPr>
+            <a:r>
+              <a:rPr sz="1100" b="0">
+                <a:solidFill>
+                  <a:srgbClr val="8EA3C4"/>
+                </a:solidFill>
+                <a:latin typeface="Microsoft YaHei"/>
+              </a:rPr>
+              <a:t>接入开源预训练 AIGC 检测器做集成；
+引入 Qwen2.5-VL 做语义层复核；
+用真实平台数据做阈值标定。</a:t>
+            </a:r>
+          </a:p>
+        </p:txBody>
+      </p:sp>
+      <p:sp>
+        <p:nvSpPr>
+          <p:cNvPr id="9" name="Rounded Rectangle 8"/>
+          <p:cNvSpPr/>
+          <p:nvPr/>
+        </p:nvSpPr>
+        <p:spPr>
+          <a:xfrm>
+            <a:off x="4361688" y="1938528"/>
+            <a:ext cx="3520440" cy="2971800"/>
+          </a:xfrm>
+          <a:prstGeom prst="roundRect">
+            <a:avLst>
+              <a:gd name="adj" fmla="val 6000"/>
+            </a:avLst>
+          </a:prstGeom>
+          <a:solidFill>
+            <a:srgbClr val="131C30"/>
+          </a:solidFill>
+          <a:ln w="9525">
+            <a:solidFill>
+              <a:srgbClr val="243656"/>
+            </a:solidFill>
+          </a:ln>
+        </p:spPr>
+        <p:style>
+          <a:lnRef idx="1">
+            <a:schemeClr val="accent1"/>
+          </a:lnRef>
+          <a:fillRef idx="3">
+            <a:schemeClr val="accent1"/>
+          </a:fillRef>
+          <a:effectRef idx="2">
+            <a:schemeClr val="accent1"/>
+          </a:effectRef>
+          <a:fontRef idx="minor">
+            <a:schemeClr val="lt1"/>
+          </a:fontRef>
+        </p:style>
+        <p:txBody>
+          <a:bodyPr rtlCol="0" anchor="ctr"/>
+          <a:lstStyle/>
+          <a:p>
+            <a:pPr algn="ctr"/>
+          </a:p>
+        </p:txBody>
+      </p:sp>
+      <p:sp>
+        <p:nvSpPr>
+          <p:cNvPr id="10" name="TextBox 9"/>
+          <p:cNvSpPr txBox="1"/>
+          <p:nvPr/>
+        </p:nvSpPr>
+        <p:spPr>
+          <a:xfrm>
+            <a:off x="4590288" y="2103120"/>
+            <a:ext cx="3017520" cy="274320"/>
+          </a:xfrm>
+          <a:prstGeom prst="rect">
+            <a:avLst/>
+          </a:prstGeom>
+          <a:noFill/>
+        </p:spPr>
+        <p:txBody>
+          <a:bodyPr wrap="square" anchor="t" lIns="0" rIns="0" tIns="0" bIns="0">
+            <a:spAutoFit/>
+          </a:bodyPr>
+          <a:lstStyle/>
+          <a:p>
+            <a:pPr algn="l">
+              <a:lnSpc>
+                <a:spcPct val="135000"/>
+              </a:lnSpc>
+            </a:pPr>
+            <a:r>
+              <a:rPr sz="1100" b="1">
+                <a:solidFill>
+                  <a:srgbClr val="35D39A"/>
+                </a:solidFill>
+                <a:latin typeface="Microsoft YaHei"/>
+              </a:rPr>
+              <a:t>3–6 个月</a:t>
+            </a:r>
+          </a:p>
+        </p:txBody>
+      </p:sp>
+      <p:sp>
+        <p:nvSpPr>
+          <p:cNvPr id="11" name="TextBox 10"/>
+          <p:cNvSpPr txBox="1"/>
+          <p:nvPr/>
+        </p:nvSpPr>
+        <p:spPr>
+          <a:xfrm>
+            <a:off x="4590288" y="2450592"/>
+            <a:ext cx="3017520" cy="411480"/>
+          </a:xfrm>
+          <a:prstGeom prst="rect">
+            <a:avLst/>
+          </a:prstGeom>
+          <a:noFill/>
+        </p:spPr>
+        <p:txBody>
+          <a:bodyPr wrap="square" anchor="t" lIns="0" rIns="0" tIns="0" bIns="0">
+            <a:spAutoFit/>
+          </a:bodyPr>
+          <a:lstStyle/>
+          <a:p>
+            <a:pPr algn="l">
+              <a:lnSpc>
+                <a:spcPct val="135000"/>
+              </a:lnSpc>
+            </a:pPr>
+            <a:r>
+              <a:rPr sz="1900" b="1">
+                <a:solidFill>
+                  <a:srgbClr val="E8EEFB"/>
+                </a:solidFill>
+                <a:latin typeface="Microsoft YaHei"/>
+              </a:rPr>
+              <a:t>场景扩展</a:t>
+            </a:r>
+          </a:p>
+        </p:txBody>
+      </p:sp>
+      <p:sp>
+        <p:nvSpPr>
+          <p:cNvPr id="12" name="TextBox 11"/>
+          <p:cNvSpPr txBox="1"/>
+          <p:nvPr/>
+        </p:nvSpPr>
+        <p:spPr>
+          <a:xfrm>
+            <a:off x="4590288" y="2999232"/>
+            <a:ext cx="3063240" cy="1783080"/>
+          </a:xfrm>
+          <a:prstGeom prst="rect">
+            <a:avLst/>
+          </a:prstGeom>
+          <a:noFill/>
+        </p:spPr>
+        <p:txBody>
+          <a:bodyPr wrap="square" anchor="t" lIns="0" rIns="0" tIns="0" bIns="0">
+            <a:spAutoFit/>
+          </a:bodyPr>
+          <a:lstStyle/>
+          <a:p>
+            <a:pPr algn="l">
+              <a:lnSpc>
+                <a:spcPct val="185000"/>
+              </a:lnSpc>
+            </a:pPr>
+            <a:r>
+              <a:rPr sz="1100" b="0">
+                <a:solidFill>
+                  <a:srgbClr val="8EA3C4"/>
+                </a:solidFill>
+                <a:latin typeface="Microsoft YaHei"/>
+              </a:rPr>
+              <a:t>从美妆扩到母婴、保健品等功效宣称密集品类；
+从图文扩到短视频帧级核验。</a:t>
+            </a:r>
+          </a:p>
+        </p:txBody>
+      </p:sp>
+      <p:sp>
+        <p:nvSpPr>
+          <p:cNvPr id="13" name="Rounded Rectangle 12"/>
+          <p:cNvSpPr/>
+          <p:nvPr/>
+        </p:nvSpPr>
+        <p:spPr>
+          <a:xfrm>
+            <a:off x="8037575" y="1938528"/>
+            <a:ext cx="3520440" cy="2971800"/>
+          </a:xfrm>
+          <a:prstGeom prst="roundRect">
+            <a:avLst>
+              <a:gd name="adj" fmla="val 6000"/>
+            </a:avLst>
+          </a:prstGeom>
+          <a:solidFill>
+            <a:srgbClr val="131C30"/>
+          </a:solidFill>
+          <a:ln w="9525">
+            <a:solidFill>
+              <a:srgbClr val="243656"/>
+            </a:solidFill>
+          </a:ln>
+        </p:spPr>
+        <p:style>
+          <a:lnRef idx="1">
+            <a:schemeClr val="accent1"/>
+          </a:lnRef>
+          <a:fillRef idx="3">
+            <a:schemeClr val="accent1"/>
+          </a:fillRef>
+          <a:effectRef idx="2">
+            <a:schemeClr val="accent1"/>
+          </a:effectRef>
+          <a:fontRef idx="minor">
+            <a:schemeClr val="lt1"/>
+          </a:fontRef>
+        </p:style>
+        <p:txBody>
+          <a:bodyPr rtlCol="0" anchor="ctr"/>
+          <a:lstStyle/>
+          <a:p>
+            <a:pPr algn="ctr"/>
+          </a:p>
+        </p:txBody>
+      </p:sp>
+      <p:sp>
+        <p:nvSpPr>
+          <p:cNvPr id="14" name="TextBox 13"/>
+          <p:cNvSpPr txBox="1"/>
+          <p:nvPr/>
+        </p:nvSpPr>
+        <p:spPr>
+          <a:xfrm>
             <a:off x="8266175" y="2103120"/>
             <a:ext cx="3017520" cy="274320"/>
           </a:xfrm>
@@ -7187,7 +8448,7 @@
                 </a:solidFill>
                 <a:latin typeface="Microsoft YaHei"/>
               </a:rPr>
-              <a:t>12</a:t>
+              <a:t>13</a:t>
             </a:r>
           </a:p>
         </p:txBody>
@@ -9802,34 +11063,34 @@
         </p:nvSpPr>
         <p:spPr>
           <a:xfrm>
-            <a:off x="685800" y="5193792"/>
-            <a:ext cx="10789920" cy="914400"/>
-          </a:xfrm>
-          <a:prstGeom prst="rect">
-            <a:avLst/>
-          </a:prstGeom>
-          <a:noFill/>
-        </p:spPr>
-        <p:txBody>
-          <a:bodyPr wrap="square" anchor="t" lIns="0" rIns="0" tIns="0" bIns="0">
-            <a:spAutoFit/>
-          </a:bodyPr>
-          <a:lstStyle/>
-          <a:p>
-            <a:pPr algn="l">
-              <a:lnSpc>
-                <a:spcPct val="170000"/>
-              </a:lnSpc>
-            </a:pPr>
-            <a:r>
-              <a:rPr sz="1100" b="0">
+            <a:off x="685800" y="5102352"/>
+            <a:ext cx="10789920" cy="1188720"/>
+          </a:xfrm>
+          <a:prstGeom prst="rect">
+            <a:avLst/>
+          </a:prstGeom>
+          <a:noFill/>
+        </p:spPr>
+        <p:txBody>
+          <a:bodyPr wrap="square" anchor="t" lIns="0" rIns="0" tIns="0" bIns="0">
+            <a:spAutoFit/>
+          </a:bodyPr>
+          <a:lstStyle/>
+          <a:p>
+            <a:pPr algn="l">
+              <a:lnSpc>
+                <a:spcPct val="160000"/>
+              </a:lnSpc>
+            </a:pPr>
+            <a:r>
+              <a:rPr sz="1050" b="0">
                 <a:solidFill>
                   <a:srgbClr val="8EA3C4"/>
                 </a:solidFill>
                 <a:latin typeface="Microsoft YaHei"/>
               </a:rPr>
-              <a:t>固定 DAG 编排（非自由 ReAct）：场景识别 → 并行取证 → 融合定级 → 生成结论。
-演示现场不会出现循环调用、幻觉工具、耗时不可控——这是作品赛最容易翻车的地方。</a:t>
+              <a:t>固定 DAG 编排（非自由 ReAct）：场景识别 → 并行取证 → 融合定级 → 生成结论，演示现场不会出现循环调用、幻觉工具、耗时不可控。
+为什么不上大模型做判定：黑盒模型给不出可核对的数值证据，跨生成器泛化也差；本项目坚持「每个结论都能反推」，大模型（Qwen2.5-VL）放在第二期做语义复核。</a:t>
             </a:r>
           </a:p>
         </p:txBody>
@@ -12947,7 +14208,7 @@
                 </a:solidFill>
                 <a:latin typeface="Microsoft YaHei"/>
               </a:rPr>
-              <a:t>时限性功效承诺</a:t>
+              <a:t>量化功效承诺缺乏依据</a:t>
             </a:r>
           </a:p>
         </p:txBody>
